--- a/presentations/research_plan_wsvad_phd_english.pptx
+++ b/presentations/research_plan_wsvad_phd_english.pptx
@@ -5,7 +5,7 @@
     <p:sldMasterId id="2147483648" r:id="rId1"/>
   </p:sldMasterIdLst>
   <p:notesMasterIdLst>
-    <p:notesMasterId r:id="rId13"/>
+    <p:notesMasterId r:id="rId14"/>
   </p:notesMasterIdLst>
   <p:sldIdLst>
     <p:sldId id="256" r:id="rId2"/>
@@ -16,9 +16,10 @@
     <p:sldId id="260" r:id="rId7"/>
     <p:sldId id="261" r:id="rId8"/>
     <p:sldId id="263" r:id="rId9"/>
-    <p:sldId id="265" r:id="rId10"/>
-    <p:sldId id="266" r:id="rId11"/>
-    <p:sldId id="268" r:id="rId12"/>
+    <p:sldId id="269" r:id="rId10"/>
+    <p:sldId id="265" r:id="rId11"/>
+    <p:sldId id="266" r:id="rId12"/>
+    <p:sldId id="268" r:id="rId13"/>
   </p:sldIdLst>
   <p:sldSz cx="12192000" cy="6858000"/>
   <p:notesSz cx="6858000" cy="9144000"/>
@@ -218,7 +219,7 @@
           <a:p>
             <a:fld id="{F6753520-9148-4373-BAA4-B078924F91BA}" type="datetimeFigureOut">
               <a:rPr lang="es-MX" smtClean="0"/>
-              <a:t>16/08/2026</a:t>
+              <a:t>18/08/2026</a:t>
             </a:fld>
             <a:endParaRPr lang="es-MX"/>
           </a:p>
@@ -748,7 +749,7 @@
           <a:p>
             <a:fld id="{78DB436E-925D-4F89-B73C-C97BBB73A2F1}" type="datetime1">
               <a:rPr lang="en-US" smtClean="0"/>
-              <a:t>8/16/2026</a:t>
+              <a:t>8/18/2026</a:t>
             </a:fld>
             <a:endParaRPr lang="en-US"/>
           </a:p>
@@ -916,7 +917,7 @@
           <a:p>
             <a:fld id="{133EB1BB-3A36-4D6D-A0FD-7206E2A10C1E}" type="datetime1">
               <a:rPr lang="en-US" smtClean="0"/>
-              <a:t>8/16/2026</a:t>
+              <a:t>8/18/2026</a:t>
             </a:fld>
             <a:endParaRPr lang="en-US"/>
           </a:p>
@@ -1094,7 +1095,7 @@
           <a:p>
             <a:fld id="{EDFA8361-70E0-46C6-8194-13E8F23ED013}" type="datetime1">
               <a:rPr lang="en-US" smtClean="0"/>
-              <a:t>8/16/2026</a:t>
+              <a:t>8/18/2026</a:t>
             </a:fld>
             <a:endParaRPr lang="en-US"/>
           </a:p>
@@ -1262,7 +1263,7 @@
           <a:p>
             <a:fld id="{E5206AFD-ECC1-4DF3-BF86-122EFFD5514E}" type="datetime1">
               <a:rPr lang="en-US" smtClean="0"/>
-              <a:t>8/16/2026</a:t>
+              <a:t>8/18/2026</a:t>
             </a:fld>
             <a:endParaRPr lang="en-US"/>
           </a:p>
@@ -1507,7 +1508,7 @@
           <a:p>
             <a:fld id="{EE7F0C0A-E3BB-4895-9CFB-BED0E9FC9D04}" type="datetime1">
               <a:rPr lang="en-US" smtClean="0"/>
-              <a:t>8/16/2026</a:t>
+              <a:t>8/18/2026</a:t>
             </a:fld>
             <a:endParaRPr lang="en-US"/>
           </a:p>
@@ -1792,7 +1793,7 @@
           <a:p>
             <a:fld id="{9A61435A-07AE-438E-AF20-E4E6BBC17193}" type="datetime1">
               <a:rPr lang="en-US" smtClean="0"/>
-              <a:t>8/16/2026</a:t>
+              <a:t>8/18/2026</a:t>
             </a:fld>
             <a:endParaRPr lang="en-US"/>
           </a:p>
@@ -2211,7 +2212,7 @@
           <a:p>
             <a:fld id="{932B9363-547B-4541-B5EA-F83F9CCB3EE3}" type="datetime1">
               <a:rPr lang="en-US" smtClean="0"/>
-              <a:t>8/16/2026</a:t>
+              <a:t>8/18/2026</a:t>
             </a:fld>
             <a:endParaRPr lang="en-US"/>
           </a:p>
@@ -2328,7 +2329,7 @@
           <a:p>
             <a:fld id="{D7C36C21-FE8D-4478-8A69-59AD09E664D5}" type="datetime1">
               <a:rPr lang="en-US" smtClean="0"/>
-              <a:t>8/16/2026</a:t>
+              <a:t>8/18/2026</a:t>
             </a:fld>
             <a:endParaRPr lang="en-US"/>
           </a:p>
@@ -2423,7 +2424,7 @@
           <a:p>
             <a:fld id="{DA05C467-F8EA-4F3E-B0E3-01A2354294BA}" type="datetime1">
               <a:rPr lang="en-US" smtClean="0"/>
-              <a:t>8/16/2026</a:t>
+              <a:t>8/18/2026</a:t>
             </a:fld>
             <a:endParaRPr lang="en-US"/>
           </a:p>
@@ -2698,7 +2699,7 @@
           <a:p>
             <a:fld id="{0EB99298-B17F-440A-894A-5EC2820DB843}" type="datetime1">
               <a:rPr lang="en-US" smtClean="0"/>
-              <a:t>8/16/2026</a:t>
+              <a:t>8/18/2026</a:t>
             </a:fld>
             <a:endParaRPr lang="en-US"/>
           </a:p>
@@ -2950,7 +2951,7 @@
           <a:p>
             <a:fld id="{2A746ACC-82C2-45E3-ABB3-54CA1D88603E}" type="datetime1">
               <a:rPr lang="en-US" smtClean="0"/>
-              <a:t>8/16/2026</a:t>
+              <a:t>8/18/2026</a:t>
             </a:fld>
             <a:endParaRPr lang="en-US"/>
           </a:p>
@@ -3161,7 +3162,7 @@
           <a:p>
             <a:fld id="{8A644CAE-3B49-40FB-A78F-EB1FCDBA88A7}" type="datetime1">
               <a:rPr lang="en-US" smtClean="0"/>
-              <a:t>8/16/2026</a:t>
+              <a:t>8/18/2026</a:t>
             </a:fld>
             <a:endParaRPr lang="en-US"/>
           </a:p>
@@ -3968,7 +3969,7 @@
               </a:defRPr>
             </a:pPr>
             <a:r>
-              <a:t>Expected Contributions</a:t>
+              <a:t>Experimental Evaluation</a:t>
             </a:r>
           </a:p>
         </p:txBody>
@@ -3982,7 +3983,7 @@
         <p:spPr>
           <a:xfrm>
             <a:off x="400050" y="1619250"/>
-            <a:ext cx="11144250" cy="609600"/>
+            <a:ext cx="11315700" cy="609600"/>
           </a:xfrm>
           <a:prstGeom prst="rect">
             <a:avLst/>
@@ -4007,7 +4008,8 @@
               </a:defRPr>
             </a:pPr>
             <a:r>
-              <a:t>The outcome aims to contribute both scientific insight and practical methods for WSVAD.</a:t>
+              <a:rPr dirty="0"/>
+              <a:t>The method will be defended through accuracy, efficiency, and robustness on established benchmarks.</a:t>
             </a:r>
           </a:p>
         </p:txBody>
@@ -4020,8 +4022,8 @@
         </p:nvSpPr>
         <p:spPr>
           <a:xfrm>
-            <a:off x="400049" y="2286000"/>
-            <a:ext cx="7334249" cy="1877039"/>
+            <a:off x="400050" y="2190750"/>
+            <a:ext cx="2571750" cy="2247900"/>
           </a:xfrm>
           <a:prstGeom prst="rect">
             <a:avLst/>
@@ -4058,20 +4060,98 @@
       </p:sp>
       <p:sp>
         <p:nvSpPr>
-          <p:cNvPr id="7" name="Rectangle 6"/>
+          <p:cNvPr id="7" name="TextBox 6"/>
+          <p:cNvSpPr txBox="1"/>
+          <p:nvPr/>
+        </p:nvSpPr>
+        <p:spPr>
+          <a:xfrm>
+            <a:off x="628650" y="2457450"/>
+            <a:ext cx="2095499" cy="781050"/>
+          </a:xfrm>
+          <a:prstGeom prst="rect">
+            <a:avLst/>
+          </a:prstGeom>
+          <a:noFill/>
+        </p:spPr>
+        <p:txBody>
+          <a:bodyPr wrap="square" lIns="0" tIns="0" rIns="0" bIns="0">
+            <a:normAutofit/>
+          </a:bodyPr>
+          <a:lstStyle/>
+          <a:p>
+            <a:pPr algn="l">
+              <a:spcAft>
+                <a:spcPts val="400"/>
+              </a:spcAft>
+              <a:defRPr sz="4300" b="1">
+                <a:solidFill>
+                  <a:srgbClr val="FF6B35"/>
+                </a:solidFill>
+                <a:latin typeface="Helvetica Neue"/>
+              </a:defRPr>
+            </a:pPr>
+            <a:r>
+              <a:t>AUC</a:t>
+            </a:r>
+          </a:p>
+        </p:txBody>
+      </p:sp>
+      <p:sp>
+        <p:nvSpPr>
+          <p:cNvPr id="8" name="TextBox 7"/>
+          <p:cNvSpPr txBox="1"/>
+          <p:nvPr/>
+        </p:nvSpPr>
+        <p:spPr>
+          <a:xfrm>
+            <a:off x="628650" y="3524250"/>
+            <a:ext cx="2095499" cy="552450"/>
+          </a:xfrm>
+          <a:prstGeom prst="rect">
+            <a:avLst/>
+          </a:prstGeom>
+          <a:noFill/>
+        </p:spPr>
+        <p:txBody>
+          <a:bodyPr wrap="square" lIns="0" tIns="0" rIns="0" bIns="0">
+            <a:normAutofit/>
+          </a:bodyPr>
+          <a:lstStyle/>
+          <a:p>
+            <a:pPr algn="l">
+              <a:spcAft>
+                <a:spcPts val="400"/>
+              </a:spcAft>
+              <a:defRPr sz="1500" b="0">
+                <a:solidFill>
+                  <a:srgbClr val="555555"/>
+                </a:solidFill>
+                <a:latin typeface="Helvetica Neue"/>
+              </a:defRPr>
+            </a:pPr>
+            <a:r>
+              <a:t>Frame-level temporal accuracy</a:t>
+            </a:r>
+          </a:p>
+        </p:txBody>
+      </p:sp>
+      <p:sp>
+        <p:nvSpPr>
+          <p:cNvPr id="9" name="Rectangle 8"/>
           <p:cNvSpPr/>
           <p:nvPr/>
         </p:nvSpPr>
         <p:spPr>
           <a:xfrm>
-            <a:off x="630802" y="2438400"/>
-            <a:ext cx="152400" cy="152400"/>
+            <a:off x="3314700" y="2190750"/>
+            <a:ext cx="2571750" cy="2247900"/>
           </a:xfrm>
           <a:prstGeom prst="rect">
             <a:avLst/>
           </a:prstGeom>
           <a:solidFill>
-            <a:srgbClr val="FF6B35"/>
+            <a:srgbClr val="EDEDED"/>
           </a:solidFill>
           <a:ln>
             <a:noFill/>
@@ -4102,14 +4182,14 @@
       </p:sp>
       <p:sp>
         <p:nvSpPr>
-          <p:cNvPr id="8" name="TextBox 7"/>
+          <p:cNvPr id="10" name="TextBox 9"/>
           <p:cNvSpPr txBox="1"/>
           <p:nvPr/>
         </p:nvSpPr>
         <p:spPr>
           <a:xfrm>
-            <a:off x="630802" y="2762250"/>
-            <a:ext cx="2914650" cy="323850"/>
+            <a:off x="3543300" y="2457450"/>
+            <a:ext cx="2095499" cy="781050"/>
           </a:xfrm>
           <a:prstGeom prst="rect">
             <a:avLst/>
@@ -4126,7 +4206,7 @@
               <a:spcAft>
                 <a:spcPts val="400"/>
               </a:spcAft>
-              <a:defRPr sz="1800" b="1">
+              <a:defRPr sz="4300" b="1">
                 <a:solidFill>
                   <a:srgbClr val="000000"/>
                 </a:solidFill>
@@ -4134,22 +4214,21 @@
               </a:defRPr>
             </a:pPr>
             <a:r>
-              <a:rPr lang="en-US" dirty="0"/>
-              <a:t>Scientific Contribution</a:t>
-            </a:r>
-          </a:p>
-        </p:txBody>
-      </p:sp>
-      <p:sp>
-        <p:nvSpPr>
-          <p:cNvPr id="9" name="TextBox 8"/>
+              <a:t>AP</a:t>
+            </a:r>
+          </a:p>
+        </p:txBody>
+      </p:sp>
+      <p:sp>
+        <p:nvSpPr>
+          <p:cNvPr id="11" name="TextBox 10"/>
           <p:cNvSpPr txBox="1"/>
           <p:nvPr/>
         </p:nvSpPr>
         <p:spPr>
           <a:xfrm>
-            <a:off x="630801" y="3200400"/>
-            <a:ext cx="6777497" cy="861059"/>
+            <a:off x="3543300" y="3524250"/>
+            <a:ext cx="2095499" cy="552450"/>
           </a:xfrm>
           <a:prstGeom prst="rect">
             <a:avLst/>
@@ -4162,13 +4241,11 @@
           </a:bodyPr>
           <a:lstStyle/>
           <a:p>
-            <a:pPr marL="285750" indent="-285750" algn="just">
+            <a:pPr algn="l">
               <a:spcAft>
                 <a:spcPts val="400"/>
               </a:spcAft>
-              <a:buFontTx/>
-              <a:buChar char="-"/>
-              <a:defRPr sz="1400" b="0">
+              <a:defRPr sz="1500" b="0">
                 <a:solidFill>
                   <a:srgbClr val="555555"/>
                 </a:solidFill>
@@ -4176,42 +4253,22 @@
               </a:defRPr>
             </a:pPr>
             <a:r>
-              <a:rPr lang="en-US" dirty="0"/>
-              <a:t>A better understanding of temporal representation learning for Weakly Supervised Video Anomaly Detection.</a:t>
-            </a:r>
-          </a:p>
-          <a:p>
-            <a:pPr marL="285750" indent="-285750" algn="just">
-              <a:spcAft>
-                <a:spcPts val="400"/>
-              </a:spcAft>
-              <a:buFontTx/>
-              <a:buChar char="-"/>
-              <a:defRPr sz="1400" b="0">
-                <a:solidFill>
-                  <a:srgbClr val="555555"/>
-                </a:solidFill>
-                <a:latin typeface="Helvetica Neue"/>
-              </a:defRPr>
-            </a:pPr>
-            <a:r>
-              <a:rPr lang="en-US" dirty="0"/>
-              <a:t>Combining efficient sequence modeling with semantic information.</a:t>
-            </a:r>
-            <a:endParaRPr dirty="0"/>
-          </a:p>
-        </p:txBody>
-      </p:sp>
-      <p:sp>
-        <p:nvSpPr>
-          <p:cNvPr id="14" name="Rectangle 13"/>
+              <a:rPr dirty="0"/>
+              <a:t>Quality under class imbalance</a:t>
+            </a:r>
+          </a:p>
+        </p:txBody>
+      </p:sp>
+      <p:sp>
+        <p:nvSpPr>
+          <p:cNvPr id="12" name="Rectangle 11"/>
           <p:cNvSpPr/>
           <p:nvPr/>
         </p:nvSpPr>
         <p:spPr>
           <a:xfrm>
-            <a:off x="4457702" y="4365523"/>
-            <a:ext cx="7334248" cy="1877038"/>
+            <a:off x="6229350" y="2190750"/>
+            <a:ext cx="2571750" cy="2247900"/>
           </a:xfrm>
           <a:prstGeom prst="rect">
             <a:avLst/>
@@ -4248,20 +4305,98 @@
       </p:sp>
       <p:sp>
         <p:nvSpPr>
+          <p:cNvPr id="13" name="TextBox 12"/>
+          <p:cNvSpPr txBox="1"/>
+          <p:nvPr/>
+        </p:nvSpPr>
+        <p:spPr>
+          <a:xfrm>
+            <a:off x="6457950" y="2457450"/>
+            <a:ext cx="2095499" cy="781050"/>
+          </a:xfrm>
+          <a:prstGeom prst="rect">
+            <a:avLst/>
+          </a:prstGeom>
+          <a:noFill/>
+        </p:spPr>
+        <p:txBody>
+          <a:bodyPr wrap="square" lIns="0" tIns="0" rIns="0" bIns="0">
+            <a:normAutofit/>
+          </a:bodyPr>
+          <a:lstStyle/>
+          <a:p>
+            <a:pPr algn="l">
+              <a:spcAft>
+                <a:spcPts val="400"/>
+              </a:spcAft>
+              <a:defRPr sz="4300" b="1">
+                <a:solidFill>
+                  <a:srgbClr val="000000"/>
+                </a:solidFill>
+                <a:latin typeface="Helvetica Neue"/>
+              </a:defRPr>
+            </a:pPr>
+            <a:r>
+              <a:t>Cost</a:t>
+            </a:r>
+          </a:p>
+        </p:txBody>
+      </p:sp>
+      <p:sp>
+        <p:nvSpPr>
+          <p:cNvPr id="14" name="TextBox 13"/>
+          <p:cNvSpPr txBox="1"/>
+          <p:nvPr/>
+        </p:nvSpPr>
+        <p:spPr>
+          <a:xfrm>
+            <a:off x="6457950" y="3524250"/>
+            <a:ext cx="2095499" cy="552450"/>
+          </a:xfrm>
+          <a:prstGeom prst="rect">
+            <a:avLst/>
+          </a:prstGeom>
+          <a:noFill/>
+        </p:spPr>
+        <p:txBody>
+          <a:bodyPr wrap="square" lIns="0" tIns="0" rIns="0" bIns="0">
+            <a:normAutofit/>
+          </a:bodyPr>
+          <a:lstStyle/>
+          <a:p>
+            <a:pPr algn="l">
+              <a:spcAft>
+                <a:spcPts val="400"/>
+              </a:spcAft>
+              <a:defRPr sz="1500" b="0">
+                <a:solidFill>
+                  <a:srgbClr val="555555"/>
+                </a:solidFill>
+                <a:latin typeface="Helvetica Neue"/>
+              </a:defRPr>
+            </a:pPr>
+            <a:r>
+              <a:t>Memory, runtime, and scalability</a:t>
+            </a:r>
+          </a:p>
+        </p:txBody>
+      </p:sp>
+      <p:sp>
+        <p:nvSpPr>
           <p:cNvPr id="15" name="Rectangle 14"/>
           <p:cNvSpPr/>
           <p:nvPr/>
         </p:nvSpPr>
         <p:spPr>
           <a:xfrm>
-            <a:off x="4647585" y="4632939"/>
-            <a:ext cx="152400" cy="152400"/>
+            <a:off x="9144000" y="2190750"/>
+            <a:ext cx="2571750" cy="2247900"/>
           </a:xfrm>
           <a:prstGeom prst="rect">
             <a:avLst/>
           </a:prstGeom>
           <a:solidFill>
-            <a:srgbClr val="000000"/>
+            <a:srgbClr val="EDEDED"/>
           </a:solidFill>
           <a:ln>
             <a:noFill/>
@@ -4298,6 +4433,672 @@
         </p:nvSpPr>
         <p:spPr>
           <a:xfrm>
+            <a:off x="9372600" y="2457450"/>
+            <a:ext cx="2095499" cy="781050"/>
+          </a:xfrm>
+          <a:prstGeom prst="rect">
+            <a:avLst/>
+          </a:prstGeom>
+          <a:noFill/>
+        </p:spPr>
+        <p:txBody>
+          <a:bodyPr wrap="square" lIns="0" tIns="0" rIns="0" bIns="0">
+            <a:normAutofit fontScale="92500"/>
+          </a:bodyPr>
+          <a:lstStyle/>
+          <a:p>
+            <a:pPr algn="l">
+              <a:spcAft>
+                <a:spcPts val="400"/>
+              </a:spcAft>
+              <a:defRPr sz="3100" b="1">
+                <a:solidFill>
+                  <a:srgbClr val="000000"/>
+                </a:solidFill>
+                <a:latin typeface="Helvetica Neue"/>
+              </a:defRPr>
+            </a:pPr>
+            <a:r>
+              <a:rPr sz="3000" dirty="0"/>
+              <a:t>Robustness</a:t>
+            </a:r>
+            <a:endParaRPr dirty="0"/>
+          </a:p>
+        </p:txBody>
+      </p:sp>
+      <p:sp>
+        <p:nvSpPr>
+          <p:cNvPr id="17" name="TextBox 16"/>
+          <p:cNvSpPr txBox="1"/>
+          <p:nvPr/>
+        </p:nvSpPr>
+        <p:spPr>
+          <a:xfrm>
+            <a:off x="9372600" y="3524250"/>
+            <a:ext cx="2095499" cy="552450"/>
+          </a:xfrm>
+          <a:prstGeom prst="rect">
+            <a:avLst/>
+          </a:prstGeom>
+          <a:noFill/>
+        </p:spPr>
+        <p:txBody>
+          <a:bodyPr wrap="square" lIns="0" tIns="0" rIns="0" bIns="0">
+            <a:normAutofit/>
+          </a:bodyPr>
+          <a:lstStyle/>
+          <a:p>
+            <a:pPr algn="l">
+              <a:spcAft>
+                <a:spcPts val="400"/>
+              </a:spcAft>
+              <a:defRPr sz="1500" b="0">
+                <a:solidFill>
+                  <a:srgbClr val="555555"/>
+                </a:solidFill>
+                <a:latin typeface="Helvetica Neue"/>
+              </a:defRPr>
+            </a:pPr>
+            <a:r>
+              <a:t>Generalization to unseen anomalies</a:t>
+            </a:r>
+          </a:p>
+        </p:txBody>
+      </p:sp>
+      <p:sp>
+        <p:nvSpPr>
+          <p:cNvPr id="18" name="TextBox 17"/>
+          <p:cNvSpPr txBox="1"/>
+          <p:nvPr/>
+        </p:nvSpPr>
+        <p:spPr>
+          <a:xfrm>
+            <a:off x="400050" y="5200650"/>
+            <a:ext cx="1428750" cy="323850"/>
+          </a:xfrm>
+          <a:prstGeom prst="rect">
+            <a:avLst/>
+          </a:prstGeom>
+          <a:noFill/>
+        </p:spPr>
+        <p:txBody>
+          <a:bodyPr wrap="square" lIns="0" tIns="0" rIns="0" bIns="0">
+            <a:normAutofit/>
+          </a:bodyPr>
+          <a:lstStyle/>
+          <a:p>
+            <a:pPr algn="l">
+              <a:spcAft>
+                <a:spcPts val="400"/>
+              </a:spcAft>
+              <a:defRPr sz="1900" b="1">
+                <a:solidFill>
+                  <a:srgbClr val="000000"/>
+                </a:solidFill>
+                <a:latin typeface="Helvetica Neue"/>
+              </a:defRPr>
+            </a:pPr>
+            <a:r>
+              <a:t>Datasets</a:t>
+            </a:r>
+          </a:p>
+        </p:txBody>
+      </p:sp>
+      <p:sp>
+        <p:nvSpPr>
+          <p:cNvPr id="19" name="TextBox 18"/>
+          <p:cNvSpPr txBox="1"/>
+          <p:nvPr/>
+        </p:nvSpPr>
+        <p:spPr>
+          <a:xfrm>
+            <a:off x="2038349" y="5200650"/>
+            <a:ext cx="6191250" cy="323850"/>
+          </a:xfrm>
+          <a:prstGeom prst="rect">
+            <a:avLst/>
+          </a:prstGeom>
+          <a:noFill/>
+        </p:spPr>
+        <p:txBody>
+          <a:bodyPr wrap="square" lIns="0" tIns="0" rIns="0" bIns="0">
+            <a:normAutofit/>
+          </a:bodyPr>
+          <a:lstStyle/>
+          <a:p>
+            <a:pPr algn="l">
+              <a:spcAft>
+                <a:spcPts val="400"/>
+              </a:spcAft>
+              <a:defRPr sz="1900" b="0">
+                <a:solidFill>
+                  <a:srgbClr val="000000"/>
+                </a:solidFill>
+                <a:latin typeface="Helvetica Neue"/>
+              </a:defRPr>
+            </a:pPr>
+            <a:r>
+              <a:t>UCF-Crime | XD-Violence | ShanghaiTech</a:t>
+            </a:r>
+          </a:p>
+        </p:txBody>
+      </p:sp>
+      <p:sp>
+        <p:nvSpPr>
+          <p:cNvPr id="21" name="TextBox 1">
+            <a:extLst>
+              <a:ext uri="{FF2B5EF4-FFF2-40B4-BE49-F238E27FC236}">
+                <a16:creationId xmlns:a16="http://schemas.microsoft.com/office/drawing/2014/main" id="{360184CC-3246-1C5E-1C0A-2253D8B90F09}"/>
+              </a:ext>
+            </a:extLst>
+          </p:cNvPr>
+          <p:cNvSpPr txBox="1"/>
+          <p:nvPr/>
+        </p:nvSpPr>
+        <p:spPr>
+          <a:xfrm>
+            <a:off x="6309360" y="353059"/>
+            <a:ext cx="5482590" cy="209550"/>
+          </a:xfrm>
+          <a:prstGeom prst="rect">
+            <a:avLst/>
+          </a:prstGeom>
+          <a:noFill/>
+        </p:spPr>
+        <p:txBody>
+          <a:bodyPr wrap="square" lIns="0" tIns="0" rIns="0" bIns="0">
+            <a:normAutofit/>
+          </a:bodyPr>
+          <a:lstStyle/>
+          <a:p>
+            <a:pPr algn="l">
+              <a:spcAft>
+                <a:spcPts val="400"/>
+              </a:spcAft>
+              <a:defRPr sz="2300" b="0">
+                <a:solidFill>
+                  <a:srgbClr val="000000"/>
+                </a:solidFill>
+                <a:latin typeface="Helvetica Neue"/>
+              </a:defRPr>
+            </a:pPr>
+            <a:r>
+              <a:rPr lang="en-US" sz="1300" b="1" i="1" dirty="0">
+                <a:solidFill>
+                  <a:srgbClr val="555555"/>
+                </a:solidFill>
+                <a:latin typeface="Helvetica Neue"/>
+              </a:rPr>
+              <a:t>04 Three-stage methodology, evaluation, and expected contributions</a:t>
+            </a:r>
+          </a:p>
+        </p:txBody>
+      </p:sp>
+      <p:sp>
+        <p:nvSpPr>
+          <p:cNvPr id="22" name="Marcador de número de diapositiva 21">
+            <a:extLst>
+              <a:ext uri="{FF2B5EF4-FFF2-40B4-BE49-F238E27FC236}">
+                <a16:creationId xmlns:a16="http://schemas.microsoft.com/office/drawing/2014/main" id="{9E3F7E97-0B9B-EE9F-071E-4B301C365303}"/>
+              </a:ext>
+            </a:extLst>
+          </p:cNvPr>
+          <p:cNvSpPr>
+            <a:spLocks noGrp="1"/>
+          </p:cNvSpPr>
+          <p:nvPr>
+            <p:ph type="sldNum" sz="quarter" idx="12"/>
+          </p:nvPr>
+        </p:nvSpPr>
+        <p:spPr/>
+        <p:txBody>
+          <a:bodyPr/>
+          <a:lstStyle/>
+          <a:p>
+            <a:fld id="{C1FF6DA9-008F-8B48-92A6-B652298478BF}" type="slidenum">
+              <a:rPr lang="en-US" smtClean="0"/>
+              <a:t>10</a:t>
+            </a:fld>
+            <a:endParaRPr lang="en-US"/>
+          </a:p>
+        </p:txBody>
+      </p:sp>
+    </p:spTree>
+  </p:cSld>
+  <p:clrMapOvr>
+    <a:masterClrMapping/>
+  </p:clrMapOvr>
+</p:sld>
+</file>
+
+<file path=ppt/slides/slide11.xml><?xml version="1.0" encoding="utf-8"?>
+<p:sld xmlns:a="http://schemas.openxmlformats.org/drawingml/2006/main" xmlns:r="http://schemas.openxmlformats.org/officeDocument/2006/relationships" xmlns:p="http://schemas.openxmlformats.org/presentationml/2006/main">
+  <p:cSld>
+    <p:bg>
+      <p:bgPr>
+        <a:solidFill>
+          <a:srgbClr val="FFFFFF"/>
+        </a:solidFill>
+        <a:effectLst/>
+      </p:bgPr>
+    </p:bg>
+    <p:spTree>
+      <p:nvGrpSpPr>
+        <p:cNvPr id="1" name=""/>
+        <p:cNvGrpSpPr/>
+        <p:nvPr/>
+      </p:nvGrpSpPr>
+      <p:grpSpPr>
+        <a:xfrm>
+          <a:off x="0" y="0"/>
+          <a:ext cx="0" cy="0"/>
+          <a:chOff x="0" y="0"/>
+          <a:chExt cx="0" cy="0"/>
+        </a:xfrm>
+      </p:grpSpPr>
+      <p:sp>
+        <p:nvSpPr>
+          <p:cNvPr id="2" name="TextBox 1"/>
+          <p:cNvSpPr txBox="1"/>
+          <p:nvPr/>
+        </p:nvSpPr>
+        <p:spPr>
+          <a:xfrm>
+            <a:off x="400050" y="400050"/>
+            <a:ext cx="3619500" cy="266700"/>
+          </a:xfrm>
+          <a:prstGeom prst="rect">
+            <a:avLst/>
+          </a:prstGeom>
+          <a:noFill/>
+        </p:spPr>
+        <p:txBody>
+          <a:bodyPr wrap="square" lIns="0" tIns="0" rIns="0" bIns="0">
+            <a:normAutofit/>
+          </a:bodyPr>
+          <a:lstStyle/>
+          <a:p>
+            <a:pPr algn="l">
+              <a:spcAft>
+                <a:spcPts val="400"/>
+              </a:spcAft>
+              <a:defRPr sz="1200" b="1">
+                <a:solidFill>
+                  <a:srgbClr val="555555"/>
+                </a:solidFill>
+                <a:latin typeface="Helvetica Neue"/>
+              </a:defRPr>
+            </a:pPr>
+            <a:r>
+              <a:t>DOCTORAL RESEARCH PLAN</a:t>
+            </a:r>
+          </a:p>
+        </p:txBody>
+      </p:sp>
+      <p:sp>
+        <p:nvSpPr>
+          <p:cNvPr id="3" name="TextBox 2"/>
+          <p:cNvSpPr txBox="1"/>
+          <p:nvPr/>
+        </p:nvSpPr>
+        <p:spPr>
+          <a:xfrm>
+            <a:off x="400050" y="781050"/>
+            <a:ext cx="7334250" cy="819150"/>
+          </a:xfrm>
+          <a:prstGeom prst="rect">
+            <a:avLst/>
+          </a:prstGeom>
+          <a:noFill/>
+        </p:spPr>
+        <p:txBody>
+          <a:bodyPr wrap="square" lIns="0" tIns="0" rIns="0" bIns="0">
+            <a:normAutofit/>
+          </a:bodyPr>
+          <a:lstStyle/>
+          <a:p>
+            <a:pPr algn="l">
+              <a:spcAft>
+                <a:spcPts val="400"/>
+              </a:spcAft>
+              <a:defRPr sz="3200" b="1">
+                <a:solidFill>
+                  <a:srgbClr val="000000"/>
+                </a:solidFill>
+                <a:latin typeface="Helvetica Neue"/>
+              </a:defRPr>
+            </a:pPr>
+            <a:r>
+              <a:t>Expected Contributions</a:t>
+            </a:r>
+          </a:p>
+        </p:txBody>
+      </p:sp>
+      <p:sp>
+        <p:nvSpPr>
+          <p:cNvPr id="4" name="TextBox 3"/>
+          <p:cNvSpPr txBox="1"/>
+          <p:nvPr/>
+        </p:nvSpPr>
+        <p:spPr>
+          <a:xfrm>
+            <a:off x="400050" y="1619250"/>
+            <a:ext cx="11144250" cy="609600"/>
+          </a:xfrm>
+          <a:prstGeom prst="rect">
+            <a:avLst/>
+          </a:prstGeom>
+          <a:noFill/>
+        </p:spPr>
+        <p:txBody>
+          <a:bodyPr wrap="square" lIns="0" tIns="0" rIns="0" bIns="0">
+            <a:normAutofit/>
+          </a:bodyPr>
+          <a:lstStyle/>
+          <a:p>
+            <a:pPr algn="l">
+              <a:spcAft>
+                <a:spcPts val="400"/>
+              </a:spcAft>
+              <a:defRPr sz="1700" b="0">
+                <a:solidFill>
+                  <a:srgbClr val="555555"/>
+                </a:solidFill>
+                <a:latin typeface="Helvetica Neue"/>
+              </a:defRPr>
+            </a:pPr>
+            <a:r>
+              <a:t>The outcome aims to contribute both scientific insight and practical methods for WSVAD.</a:t>
+            </a:r>
+          </a:p>
+        </p:txBody>
+      </p:sp>
+      <p:sp>
+        <p:nvSpPr>
+          <p:cNvPr id="6" name="Rectangle 5"/>
+          <p:cNvSpPr/>
+          <p:nvPr/>
+        </p:nvSpPr>
+        <p:spPr>
+          <a:xfrm>
+            <a:off x="400049" y="2286000"/>
+            <a:ext cx="7334249" cy="1877039"/>
+          </a:xfrm>
+          <a:prstGeom prst="rect">
+            <a:avLst/>
+          </a:prstGeom>
+          <a:solidFill>
+            <a:srgbClr val="EDEDED"/>
+          </a:solidFill>
+          <a:ln>
+            <a:noFill/>
+          </a:ln>
+        </p:spPr>
+        <p:style>
+          <a:lnRef idx="1">
+            <a:schemeClr val="accent1"/>
+          </a:lnRef>
+          <a:fillRef idx="3">
+            <a:schemeClr val="accent1"/>
+          </a:fillRef>
+          <a:effectRef idx="2">
+            <a:schemeClr val="accent1"/>
+          </a:effectRef>
+          <a:fontRef idx="minor">
+            <a:schemeClr val="lt1"/>
+          </a:fontRef>
+        </p:style>
+        <p:txBody>
+          <a:bodyPr rtlCol="0" anchor="ctr"/>
+          <a:lstStyle/>
+          <a:p>
+            <a:pPr algn="ctr"/>
+            <a:endParaRPr/>
+          </a:p>
+        </p:txBody>
+      </p:sp>
+      <p:sp>
+        <p:nvSpPr>
+          <p:cNvPr id="7" name="Rectangle 6"/>
+          <p:cNvSpPr/>
+          <p:nvPr/>
+        </p:nvSpPr>
+        <p:spPr>
+          <a:xfrm>
+            <a:off x="630802" y="2438400"/>
+            <a:ext cx="152400" cy="152400"/>
+          </a:xfrm>
+          <a:prstGeom prst="rect">
+            <a:avLst/>
+          </a:prstGeom>
+          <a:solidFill>
+            <a:srgbClr val="FF6B35"/>
+          </a:solidFill>
+          <a:ln>
+            <a:noFill/>
+          </a:ln>
+        </p:spPr>
+        <p:style>
+          <a:lnRef idx="1">
+            <a:schemeClr val="accent1"/>
+          </a:lnRef>
+          <a:fillRef idx="3">
+            <a:schemeClr val="accent1"/>
+          </a:fillRef>
+          <a:effectRef idx="2">
+            <a:schemeClr val="accent1"/>
+          </a:effectRef>
+          <a:fontRef idx="minor">
+            <a:schemeClr val="lt1"/>
+          </a:fontRef>
+        </p:style>
+        <p:txBody>
+          <a:bodyPr rtlCol="0" anchor="ctr"/>
+          <a:lstStyle/>
+          <a:p>
+            <a:pPr algn="ctr"/>
+            <a:endParaRPr/>
+          </a:p>
+        </p:txBody>
+      </p:sp>
+      <p:sp>
+        <p:nvSpPr>
+          <p:cNvPr id="8" name="TextBox 7"/>
+          <p:cNvSpPr txBox="1"/>
+          <p:nvPr/>
+        </p:nvSpPr>
+        <p:spPr>
+          <a:xfrm>
+            <a:off x="630802" y="2762250"/>
+            <a:ext cx="2914650" cy="323850"/>
+          </a:xfrm>
+          <a:prstGeom prst="rect">
+            <a:avLst/>
+          </a:prstGeom>
+          <a:noFill/>
+        </p:spPr>
+        <p:txBody>
+          <a:bodyPr wrap="square" lIns="0" tIns="0" rIns="0" bIns="0">
+            <a:normAutofit/>
+          </a:bodyPr>
+          <a:lstStyle/>
+          <a:p>
+            <a:pPr algn="l">
+              <a:spcAft>
+                <a:spcPts val="400"/>
+              </a:spcAft>
+              <a:defRPr sz="1800" b="1">
+                <a:solidFill>
+                  <a:srgbClr val="000000"/>
+                </a:solidFill>
+                <a:latin typeface="Helvetica Neue"/>
+              </a:defRPr>
+            </a:pPr>
+            <a:r>
+              <a:rPr lang="en-US" dirty="0"/>
+              <a:t>Scientific Contribution</a:t>
+            </a:r>
+          </a:p>
+        </p:txBody>
+      </p:sp>
+      <p:sp>
+        <p:nvSpPr>
+          <p:cNvPr id="9" name="TextBox 8"/>
+          <p:cNvSpPr txBox="1"/>
+          <p:nvPr/>
+        </p:nvSpPr>
+        <p:spPr>
+          <a:xfrm>
+            <a:off x="630801" y="3200400"/>
+            <a:ext cx="6777497" cy="861059"/>
+          </a:xfrm>
+          <a:prstGeom prst="rect">
+            <a:avLst/>
+          </a:prstGeom>
+          <a:noFill/>
+        </p:spPr>
+        <p:txBody>
+          <a:bodyPr wrap="square" lIns="0" tIns="0" rIns="0" bIns="0">
+            <a:normAutofit/>
+          </a:bodyPr>
+          <a:lstStyle/>
+          <a:p>
+            <a:pPr marL="285750" indent="-285750" algn="just">
+              <a:spcAft>
+                <a:spcPts val="400"/>
+              </a:spcAft>
+              <a:buFontTx/>
+              <a:buChar char="-"/>
+              <a:defRPr sz="1400" b="0">
+                <a:solidFill>
+                  <a:srgbClr val="555555"/>
+                </a:solidFill>
+                <a:latin typeface="Helvetica Neue"/>
+              </a:defRPr>
+            </a:pPr>
+            <a:r>
+              <a:rPr lang="en-US" dirty="0"/>
+              <a:t>A better understanding of temporal representation learning for Weakly Supervised Video Anomaly Detection.</a:t>
+            </a:r>
+          </a:p>
+          <a:p>
+            <a:pPr marL="285750" indent="-285750" algn="just">
+              <a:spcAft>
+                <a:spcPts val="400"/>
+              </a:spcAft>
+              <a:buFontTx/>
+              <a:buChar char="-"/>
+              <a:defRPr sz="1400" b="0">
+                <a:solidFill>
+                  <a:srgbClr val="555555"/>
+                </a:solidFill>
+                <a:latin typeface="Helvetica Neue"/>
+              </a:defRPr>
+            </a:pPr>
+            <a:r>
+              <a:rPr lang="en-US" dirty="0"/>
+              <a:t>Combining efficient sequence modeling with semantic information.</a:t>
+            </a:r>
+            <a:endParaRPr dirty="0"/>
+          </a:p>
+        </p:txBody>
+      </p:sp>
+      <p:sp>
+        <p:nvSpPr>
+          <p:cNvPr id="14" name="Rectangle 13"/>
+          <p:cNvSpPr/>
+          <p:nvPr/>
+        </p:nvSpPr>
+        <p:spPr>
+          <a:xfrm>
+            <a:off x="4457702" y="4365523"/>
+            <a:ext cx="7334248" cy="1877038"/>
+          </a:xfrm>
+          <a:prstGeom prst="rect">
+            <a:avLst/>
+          </a:prstGeom>
+          <a:solidFill>
+            <a:srgbClr val="EDEDED"/>
+          </a:solidFill>
+          <a:ln>
+            <a:noFill/>
+          </a:ln>
+        </p:spPr>
+        <p:style>
+          <a:lnRef idx="1">
+            <a:schemeClr val="accent1"/>
+          </a:lnRef>
+          <a:fillRef idx="3">
+            <a:schemeClr val="accent1"/>
+          </a:fillRef>
+          <a:effectRef idx="2">
+            <a:schemeClr val="accent1"/>
+          </a:effectRef>
+          <a:fontRef idx="minor">
+            <a:schemeClr val="lt1"/>
+          </a:fontRef>
+        </p:style>
+        <p:txBody>
+          <a:bodyPr rtlCol="0" anchor="ctr"/>
+          <a:lstStyle/>
+          <a:p>
+            <a:pPr algn="ctr"/>
+            <a:endParaRPr/>
+          </a:p>
+        </p:txBody>
+      </p:sp>
+      <p:sp>
+        <p:nvSpPr>
+          <p:cNvPr id="15" name="Rectangle 14"/>
+          <p:cNvSpPr/>
+          <p:nvPr/>
+        </p:nvSpPr>
+        <p:spPr>
+          <a:xfrm>
+            <a:off x="4647585" y="4632939"/>
+            <a:ext cx="152400" cy="152400"/>
+          </a:xfrm>
+          <a:prstGeom prst="rect">
+            <a:avLst/>
+          </a:prstGeom>
+          <a:solidFill>
+            <a:srgbClr val="000000"/>
+          </a:solidFill>
+          <a:ln>
+            <a:noFill/>
+          </a:ln>
+        </p:spPr>
+        <p:style>
+          <a:lnRef idx="1">
+            <a:schemeClr val="accent1"/>
+          </a:lnRef>
+          <a:fillRef idx="3">
+            <a:schemeClr val="accent1"/>
+          </a:fillRef>
+          <a:effectRef idx="2">
+            <a:schemeClr val="accent1"/>
+          </a:effectRef>
+          <a:fontRef idx="minor">
+            <a:schemeClr val="lt1"/>
+          </a:fontRef>
+        </p:style>
+        <p:txBody>
+          <a:bodyPr rtlCol="0" anchor="ctr"/>
+          <a:lstStyle/>
+          <a:p>
+            <a:pPr algn="ctr"/>
+            <a:endParaRPr/>
+          </a:p>
+        </p:txBody>
+      </p:sp>
+      <p:sp>
+        <p:nvSpPr>
+          <p:cNvPr id="16" name="TextBox 15"/>
+          <p:cNvSpPr txBox="1"/>
+          <p:nvPr/>
+        </p:nvSpPr>
+        <p:spPr>
+          <a:xfrm>
             <a:off x="4647585" y="4956789"/>
             <a:ext cx="2914650" cy="323850"/>
           </a:xfrm>
@@ -4445,7 +5246,7 @@
           <a:p>
             <a:fld id="{C1FF6DA9-008F-8B48-92A6-B652298478BF}" type="slidenum">
               <a:rPr lang="en-US" smtClean="0"/>
-              <a:t>10</a:t>
+              <a:t>11</a:t>
             </a:fld>
             <a:endParaRPr lang="en-US"/>
           </a:p>
@@ -4459,7 +5260,7 @@
 </p:sld>
 </file>
 
-<file path=ppt/slides/slide11.xml><?xml version="1.0" encoding="utf-8"?>
+<file path=ppt/slides/slide12.xml><?xml version="1.0" encoding="utf-8"?>
 <p:sld xmlns:a="http://schemas.openxmlformats.org/drawingml/2006/main" xmlns:r="http://schemas.openxmlformats.org/officeDocument/2006/relationships" xmlns:p="http://schemas.openxmlformats.org/presentationml/2006/main">
   <p:cSld>
     <p:spTree>
@@ -4499,7 +5300,7 @@
           <a:p>
             <a:fld id="{C1FF6DA9-008F-8B48-92A6-B652298478BF}" type="slidenum">
               <a:rPr lang="en-US" smtClean="0"/>
-              <a:t>11</a:t>
+              <a:t>12</a:t>
             </a:fld>
             <a:endParaRPr lang="en-US"/>
           </a:p>
@@ -11390,8 +12191,8 @@
         </p:nvSpPr>
         <p:spPr>
           <a:xfrm>
-            <a:off x="6309360" y="353059"/>
-            <a:ext cx="5482590" cy="209550"/>
+            <a:off x="4975123" y="353059"/>
+            <a:ext cx="6816827" cy="209550"/>
           </a:xfrm>
           <a:prstGeom prst="rect">
             <a:avLst/>
@@ -11400,7 +12201,7 @@
         </p:spPr>
         <p:txBody>
           <a:bodyPr wrap="square" lIns="0" tIns="0" rIns="0" bIns="0">
-            <a:normAutofit/>
+            <a:normAutofit fontScale="92500"/>
           </a:bodyPr>
           <a:lstStyle/>
           <a:p>
@@ -11422,7 +12223,7 @@
                 </a:solidFill>
                 <a:latin typeface="Helvetica Neue"/>
               </a:rPr>
-              <a:t>04 Three-stage methodology, evaluation, and expected contributions</a:t>
+              <a:t>04 Three-stage methodology,  previous research, evaluation, and expected contributions</a:t>
             </a:r>
           </a:p>
         </p:txBody>
@@ -11467,14 +12268,6 @@
 <file path=ppt/slides/slide9.xml><?xml version="1.0" encoding="utf-8"?>
 <p:sld xmlns:a="http://schemas.openxmlformats.org/drawingml/2006/main" xmlns:r="http://schemas.openxmlformats.org/officeDocument/2006/relationships" xmlns:p="http://schemas.openxmlformats.org/presentationml/2006/main">
   <p:cSld>
-    <p:bg>
-      <p:bgPr>
-        <a:solidFill>
-          <a:srgbClr val="FFFFFF"/>
-        </a:solidFill>
-        <a:effectLst/>
-      </p:bgPr>
-    </p:bg>
     <p:spTree>
       <p:nvGrpSpPr>
         <p:cNvPr id="1" name=""/>
@@ -11491,7 +12284,140 @@
       </p:grpSpPr>
       <p:sp>
         <p:nvSpPr>
-          <p:cNvPr id="2" name="TextBox 1"/>
+          <p:cNvPr id="2" name="Marcador de número de diapositiva 1">
+            <a:extLst>
+              <a:ext uri="{FF2B5EF4-FFF2-40B4-BE49-F238E27FC236}">
+                <a16:creationId xmlns:a16="http://schemas.microsoft.com/office/drawing/2014/main" id="{B2AD05FC-141D-8303-F219-A2E6D0E8F2D4}"/>
+              </a:ext>
+            </a:extLst>
+          </p:cNvPr>
+          <p:cNvSpPr>
+            <a:spLocks noGrp="1"/>
+          </p:cNvSpPr>
+          <p:nvPr>
+            <p:ph type="sldNum" sz="quarter" idx="12"/>
+          </p:nvPr>
+        </p:nvSpPr>
+        <p:spPr/>
+        <p:txBody>
+          <a:bodyPr/>
+          <a:lstStyle/>
+          <a:p>
+            <a:fld id="{C1FF6DA9-008F-8B48-92A6-B652298478BF}" type="slidenum">
+              <a:rPr lang="en-US" smtClean="0"/>
+              <a:t>9</a:t>
+            </a:fld>
+            <a:endParaRPr lang="en-US"/>
+          </a:p>
+        </p:txBody>
+      </p:sp>
+      <p:sp>
+        <p:nvSpPr>
+          <p:cNvPr id="3" name="TextBox 2">
+            <a:extLst>
+              <a:ext uri="{FF2B5EF4-FFF2-40B4-BE49-F238E27FC236}">
+                <a16:creationId xmlns:a16="http://schemas.microsoft.com/office/drawing/2014/main" id="{BD9D01BB-9A3B-9516-AAE6-8D4D9D068ACC}"/>
+              </a:ext>
+            </a:extLst>
+          </p:cNvPr>
+          <p:cNvSpPr txBox="1"/>
+          <p:nvPr/>
+        </p:nvSpPr>
+        <p:spPr>
+          <a:xfrm>
+            <a:off x="400050" y="781050"/>
+            <a:ext cx="8979924" cy="819150"/>
+          </a:xfrm>
+          <a:prstGeom prst="rect">
+            <a:avLst/>
+          </a:prstGeom>
+          <a:noFill/>
+        </p:spPr>
+        <p:txBody>
+          <a:bodyPr wrap="square" lIns="0" tIns="0" rIns="0" bIns="0">
+            <a:normAutofit/>
+          </a:bodyPr>
+          <a:lstStyle/>
+          <a:p>
+            <a:pPr algn="l">
+              <a:spcAft>
+                <a:spcPts val="400"/>
+              </a:spcAft>
+              <a:defRPr sz="3200" b="1">
+                <a:solidFill>
+                  <a:srgbClr val="000000"/>
+                </a:solidFill>
+                <a:latin typeface="Helvetica Neue"/>
+              </a:defRPr>
+            </a:pPr>
+            <a:r>
+              <a:rPr lang="en-US" dirty="0"/>
+              <a:t>Specific Limitations in Previous Research</a:t>
+            </a:r>
+            <a:endParaRPr dirty="0"/>
+          </a:p>
+        </p:txBody>
+      </p:sp>
+      <p:sp>
+        <p:nvSpPr>
+          <p:cNvPr id="9" name="TextBox 1">
+            <a:extLst>
+              <a:ext uri="{FF2B5EF4-FFF2-40B4-BE49-F238E27FC236}">
+                <a16:creationId xmlns:a16="http://schemas.microsoft.com/office/drawing/2014/main" id="{4F5A707A-5B2A-D4C0-E2BC-C13C5DE48825}"/>
+              </a:ext>
+            </a:extLst>
+          </p:cNvPr>
+          <p:cNvSpPr txBox="1"/>
+          <p:nvPr/>
+        </p:nvSpPr>
+        <p:spPr>
+          <a:xfrm>
+            <a:off x="4975123" y="353059"/>
+            <a:ext cx="6816827" cy="209550"/>
+          </a:xfrm>
+          <a:prstGeom prst="rect">
+            <a:avLst/>
+          </a:prstGeom>
+          <a:noFill/>
+        </p:spPr>
+        <p:txBody>
+          <a:bodyPr wrap="square" lIns="0" tIns="0" rIns="0" bIns="0">
+            <a:normAutofit fontScale="92500"/>
+          </a:bodyPr>
+          <a:lstStyle/>
+          <a:p>
+            <a:pPr algn="l">
+              <a:spcAft>
+                <a:spcPts val="400"/>
+              </a:spcAft>
+              <a:defRPr sz="2300" b="0">
+                <a:solidFill>
+                  <a:srgbClr val="000000"/>
+                </a:solidFill>
+                <a:latin typeface="Helvetica Neue"/>
+              </a:defRPr>
+            </a:pPr>
+            <a:r>
+              <a:rPr lang="en-US" sz="1300" b="1" i="1" dirty="0">
+                <a:solidFill>
+                  <a:srgbClr val="555555"/>
+                </a:solidFill>
+                <a:latin typeface="Helvetica Neue"/>
+              </a:rPr>
+              <a:t>04 Three-stage methodology,  previous research, evaluation, and expected contributions</a:t>
+            </a:r>
+          </a:p>
+        </p:txBody>
+      </p:sp>
+      <p:sp>
+        <p:nvSpPr>
+          <p:cNvPr id="10" name="TextBox 1">
+            <a:extLst>
+              <a:ext uri="{FF2B5EF4-FFF2-40B4-BE49-F238E27FC236}">
+                <a16:creationId xmlns:a16="http://schemas.microsoft.com/office/drawing/2014/main" id="{8047324D-7B96-D8A3-7548-7B9B19DEB018}"/>
+              </a:ext>
+            </a:extLst>
+          </p:cNvPr>
           <p:cNvSpPr txBox="1"/>
           <p:nvPr/>
         </p:nvSpPr>
@@ -11523,665 +12449,385 @@
               </a:defRPr>
             </a:pPr>
             <a:r>
+              <a:rPr dirty="0"/>
               <a:t>DOCTORAL RESEARCH PLAN</a:t>
             </a:r>
           </a:p>
         </p:txBody>
       </p:sp>
-      <p:sp>
-        <p:nvSpPr>
-          <p:cNvPr id="3" name="TextBox 2"/>
-          <p:cNvSpPr txBox="1"/>
-          <p:nvPr/>
-        </p:nvSpPr>
-        <p:spPr>
-          <a:xfrm>
-            <a:off x="400050" y="781050"/>
-            <a:ext cx="7334250" cy="819150"/>
-          </a:xfrm>
-          <a:prstGeom prst="rect">
-            <a:avLst/>
-          </a:prstGeom>
-          <a:noFill/>
-        </p:spPr>
-        <p:txBody>
-          <a:bodyPr wrap="square" lIns="0" tIns="0" rIns="0" bIns="0">
-            <a:normAutofit/>
-          </a:bodyPr>
-          <a:lstStyle/>
-          <a:p>
-            <a:pPr algn="l">
-              <a:spcAft>
-                <a:spcPts val="400"/>
-              </a:spcAft>
-              <a:defRPr sz="3200" b="1">
-                <a:solidFill>
-                  <a:srgbClr val="000000"/>
-                </a:solidFill>
-                <a:latin typeface="Helvetica Neue"/>
-              </a:defRPr>
-            </a:pPr>
-            <a:r>
-              <a:t>Experimental Evaluation</a:t>
-            </a:r>
-          </a:p>
-        </p:txBody>
-      </p:sp>
-      <p:sp>
-        <p:nvSpPr>
-          <p:cNvPr id="4" name="TextBox 3"/>
-          <p:cNvSpPr txBox="1"/>
-          <p:nvPr/>
-        </p:nvSpPr>
-        <p:spPr>
-          <a:xfrm>
-            <a:off x="400050" y="1619250"/>
-            <a:ext cx="11315700" cy="609600"/>
-          </a:xfrm>
-          <a:prstGeom prst="rect">
-            <a:avLst/>
-          </a:prstGeom>
-          <a:noFill/>
-        </p:spPr>
-        <p:txBody>
-          <a:bodyPr wrap="square" lIns="0" tIns="0" rIns="0" bIns="0">
-            <a:normAutofit/>
-          </a:bodyPr>
-          <a:lstStyle/>
-          <a:p>
-            <a:pPr algn="l">
-              <a:spcAft>
-                <a:spcPts val="400"/>
-              </a:spcAft>
-              <a:defRPr sz="1700" b="0">
-                <a:solidFill>
-                  <a:srgbClr val="555555"/>
-                </a:solidFill>
-                <a:latin typeface="Helvetica Neue"/>
-              </a:defRPr>
-            </a:pPr>
-            <a:r>
-              <a:rPr dirty="0"/>
-              <a:t>The method will be defended through accuracy, efficiency, and robustness on established benchmarks.</a:t>
-            </a:r>
-          </a:p>
-        </p:txBody>
-      </p:sp>
-      <p:sp>
-        <p:nvSpPr>
-          <p:cNvPr id="6" name="Rectangle 5"/>
-          <p:cNvSpPr/>
-          <p:nvPr/>
-        </p:nvSpPr>
-        <p:spPr>
-          <a:xfrm>
-            <a:off x="400050" y="2190750"/>
-            <a:ext cx="2571750" cy="2247900"/>
-          </a:xfrm>
-          <a:prstGeom prst="rect">
-            <a:avLst/>
-          </a:prstGeom>
-          <a:solidFill>
-            <a:srgbClr val="EDEDED"/>
-          </a:solidFill>
-          <a:ln>
-            <a:noFill/>
-          </a:ln>
-        </p:spPr>
-        <p:style>
-          <a:lnRef idx="1">
-            <a:schemeClr val="accent1"/>
-          </a:lnRef>
-          <a:fillRef idx="3">
-            <a:schemeClr val="accent1"/>
-          </a:fillRef>
-          <a:effectRef idx="2">
-            <a:schemeClr val="accent1"/>
-          </a:effectRef>
-          <a:fontRef idx="minor">
-            <a:schemeClr val="lt1"/>
-          </a:fontRef>
-        </p:style>
-        <p:txBody>
-          <a:bodyPr rtlCol="0" anchor="ctr"/>
-          <a:lstStyle/>
-          <a:p>
-            <a:pPr algn="ctr"/>
-            <a:endParaRPr/>
-          </a:p>
-        </p:txBody>
-      </p:sp>
-      <p:sp>
-        <p:nvSpPr>
-          <p:cNvPr id="7" name="TextBox 6"/>
-          <p:cNvSpPr txBox="1"/>
-          <p:nvPr/>
-        </p:nvSpPr>
-        <p:spPr>
-          <a:xfrm>
-            <a:off x="628650" y="2457450"/>
-            <a:ext cx="2095499" cy="781050"/>
-          </a:xfrm>
-          <a:prstGeom prst="rect">
-            <a:avLst/>
-          </a:prstGeom>
-          <a:noFill/>
-        </p:spPr>
-        <p:txBody>
-          <a:bodyPr wrap="square" lIns="0" tIns="0" rIns="0" bIns="0">
-            <a:normAutofit/>
-          </a:bodyPr>
-          <a:lstStyle/>
-          <a:p>
-            <a:pPr algn="l">
-              <a:spcAft>
-                <a:spcPts val="400"/>
-              </a:spcAft>
-              <a:defRPr sz="4300" b="1">
-                <a:solidFill>
-                  <a:srgbClr val="FF6B35"/>
-                </a:solidFill>
-                <a:latin typeface="Helvetica Neue"/>
-              </a:defRPr>
-            </a:pPr>
-            <a:r>
-              <a:t>AUC</a:t>
-            </a:r>
-          </a:p>
-        </p:txBody>
-      </p:sp>
-      <p:sp>
-        <p:nvSpPr>
-          <p:cNvPr id="8" name="TextBox 7"/>
-          <p:cNvSpPr txBox="1"/>
-          <p:nvPr/>
-        </p:nvSpPr>
-        <p:spPr>
-          <a:xfrm>
-            <a:off x="628650" y="3524250"/>
-            <a:ext cx="2095499" cy="552450"/>
-          </a:xfrm>
-          <a:prstGeom prst="rect">
-            <a:avLst/>
-          </a:prstGeom>
-          <a:noFill/>
-        </p:spPr>
-        <p:txBody>
-          <a:bodyPr wrap="square" lIns="0" tIns="0" rIns="0" bIns="0">
-            <a:normAutofit/>
-          </a:bodyPr>
-          <a:lstStyle/>
-          <a:p>
-            <a:pPr algn="l">
-              <a:spcAft>
-                <a:spcPts val="400"/>
-              </a:spcAft>
-              <a:defRPr sz="1500" b="0">
-                <a:solidFill>
-                  <a:srgbClr val="555555"/>
-                </a:solidFill>
-                <a:latin typeface="Helvetica Neue"/>
-              </a:defRPr>
-            </a:pPr>
-            <a:r>
-              <a:t>Frame-level temporal accuracy</a:t>
-            </a:r>
-          </a:p>
-        </p:txBody>
-      </p:sp>
-      <p:sp>
-        <p:nvSpPr>
-          <p:cNvPr id="9" name="Rectangle 8"/>
-          <p:cNvSpPr/>
-          <p:nvPr/>
-        </p:nvSpPr>
-        <p:spPr>
-          <a:xfrm>
-            <a:off x="3314700" y="2190750"/>
-            <a:ext cx="2571750" cy="2247900"/>
-          </a:xfrm>
-          <a:prstGeom prst="rect">
-            <a:avLst/>
-          </a:prstGeom>
-          <a:solidFill>
-            <a:srgbClr val="EDEDED"/>
-          </a:solidFill>
-          <a:ln>
-            <a:noFill/>
-          </a:ln>
-        </p:spPr>
-        <p:style>
-          <a:lnRef idx="1">
-            <a:schemeClr val="accent1"/>
-          </a:lnRef>
-          <a:fillRef idx="3">
-            <a:schemeClr val="accent1"/>
-          </a:fillRef>
-          <a:effectRef idx="2">
-            <a:schemeClr val="accent1"/>
-          </a:effectRef>
-          <a:fontRef idx="minor">
-            <a:schemeClr val="lt1"/>
-          </a:fontRef>
-        </p:style>
-        <p:txBody>
-          <a:bodyPr rtlCol="0" anchor="ctr"/>
-          <a:lstStyle/>
-          <a:p>
-            <a:pPr algn="ctr"/>
-            <a:endParaRPr/>
-          </a:p>
-        </p:txBody>
-      </p:sp>
-      <p:sp>
-        <p:nvSpPr>
-          <p:cNvPr id="10" name="TextBox 9"/>
-          <p:cNvSpPr txBox="1"/>
-          <p:nvPr/>
-        </p:nvSpPr>
-        <p:spPr>
-          <a:xfrm>
-            <a:off x="3543300" y="2457450"/>
-            <a:ext cx="2095499" cy="781050"/>
-          </a:xfrm>
-          <a:prstGeom prst="rect">
-            <a:avLst/>
-          </a:prstGeom>
-          <a:noFill/>
-        </p:spPr>
-        <p:txBody>
-          <a:bodyPr wrap="square" lIns="0" tIns="0" rIns="0" bIns="0">
-            <a:normAutofit/>
-          </a:bodyPr>
-          <a:lstStyle/>
-          <a:p>
-            <a:pPr algn="l">
-              <a:spcAft>
-                <a:spcPts val="400"/>
-              </a:spcAft>
-              <a:defRPr sz="4300" b="1">
-                <a:solidFill>
-                  <a:srgbClr val="000000"/>
-                </a:solidFill>
-                <a:latin typeface="Helvetica Neue"/>
-              </a:defRPr>
-            </a:pPr>
-            <a:r>
-              <a:t>AP</a:t>
-            </a:r>
-          </a:p>
-        </p:txBody>
-      </p:sp>
-      <p:sp>
-        <p:nvSpPr>
-          <p:cNvPr id="11" name="TextBox 10"/>
-          <p:cNvSpPr txBox="1"/>
-          <p:nvPr/>
-        </p:nvSpPr>
-        <p:spPr>
-          <a:xfrm>
-            <a:off x="3543300" y="3524250"/>
-            <a:ext cx="2095499" cy="552450"/>
-          </a:xfrm>
-          <a:prstGeom prst="rect">
-            <a:avLst/>
-          </a:prstGeom>
-          <a:noFill/>
-        </p:spPr>
-        <p:txBody>
-          <a:bodyPr wrap="square" lIns="0" tIns="0" rIns="0" bIns="0">
-            <a:normAutofit/>
-          </a:bodyPr>
-          <a:lstStyle/>
-          <a:p>
-            <a:pPr algn="l">
-              <a:spcAft>
-                <a:spcPts val="400"/>
-              </a:spcAft>
-              <a:defRPr sz="1500" b="0">
-                <a:solidFill>
-                  <a:srgbClr val="555555"/>
-                </a:solidFill>
-                <a:latin typeface="Helvetica Neue"/>
-              </a:defRPr>
-            </a:pPr>
-            <a:r>
-              <a:rPr dirty="0"/>
-              <a:t>Quality under class imbalance</a:t>
-            </a:r>
-          </a:p>
-        </p:txBody>
-      </p:sp>
-      <p:sp>
-        <p:nvSpPr>
-          <p:cNvPr id="12" name="Rectangle 11"/>
-          <p:cNvSpPr/>
-          <p:nvPr/>
-        </p:nvSpPr>
-        <p:spPr>
-          <a:xfrm>
-            <a:off x="6229350" y="2190750"/>
-            <a:ext cx="2571750" cy="2247900"/>
-          </a:xfrm>
-          <a:prstGeom prst="rect">
-            <a:avLst/>
-          </a:prstGeom>
-          <a:solidFill>
-            <a:srgbClr val="EDEDED"/>
-          </a:solidFill>
-          <a:ln>
-            <a:noFill/>
-          </a:ln>
-        </p:spPr>
-        <p:style>
-          <a:lnRef idx="1">
-            <a:schemeClr val="accent1"/>
-          </a:lnRef>
-          <a:fillRef idx="3">
-            <a:schemeClr val="accent1"/>
-          </a:fillRef>
-          <a:effectRef idx="2">
-            <a:schemeClr val="accent1"/>
-          </a:effectRef>
-          <a:fontRef idx="minor">
-            <a:schemeClr val="lt1"/>
-          </a:fontRef>
-        </p:style>
-        <p:txBody>
-          <a:bodyPr rtlCol="0" anchor="ctr"/>
-          <a:lstStyle/>
-          <a:p>
-            <a:pPr algn="ctr"/>
-            <a:endParaRPr/>
-          </a:p>
-        </p:txBody>
-      </p:sp>
-      <p:sp>
-        <p:nvSpPr>
-          <p:cNvPr id="13" name="TextBox 12"/>
-          <p:cNvSpPr txBox="1"/>
-          <p:nvPr/>
-        </p:nvSpPr>
-        <p:spPr>
-          <a:xfrm>
-            <a:off x="6457950" y="2457450"/>
-            <a:ext cx="2095499" cy="781050"/>
-          </a:xfrm>
-          <a:prstGeom prst="rect">
-            <a:avLst/>
-          </a:prstGeom>
-          <a:noFill/>
-        </p:spPr>
-        <p:txBody>
-          <a:bodyPr wrap="square" lIns="0" tIns="0" rIns="0" bIns="0">
-            <a:normAutofit/>
-          </a:bodyPr>
-          <a:lstStyle/>
-          <a:p>
-            <a:pPr algn="l">
-              <a:spcAft>
-                <a:spcPts val="400"/>
-              </a:spcAft>
-              <a:defRPr sz="4300" b="1">
-                <a:solidFill>
-                  <a:srgbClr val="000000"/>
-                </a:solidFill>
-                <a:latin typeface="Helvetica Neue"/>
-              </a:defRPr>
-            </a:pPr>
-            <a:r>
-              <a:t>Cost</a:t>
-            </a:r>
-          </a:p>
-        </p:txBody>
-      </p:sp>
-      <p:sp>
-        <p:nvSpPr>
-          <p:cNvPr id="14" name="TextBox 13"/>
-          <p:cNvSpPr txBox="1"/>
-          <p:nvPr/>
-        </p:nvSpPr>
-        <p:spPr>
-          <a:xfrm>
-            <a:off x="6457950" y="3524250"/>
-            <a:ext cx="2095499" cy="552450"/>
-          </a:xfrm>
-          <a:prstGeom prst="rect">
-            <a:avLst/>
-          </a:prstGeom>
-          <a:noFill/>
-        </p:spPr>
-        <p:txBody>
-          <a:bodyPr wrap="square" lIns="0" tIns="0" rIns="0" bIns="0">
-            <a:normAutofit/>
-          </a:bodyPr>
-          <a:lstStyle/>
-          <a:p>
-            <a:pPr algn="l">
-              <a:spcAft>
-                <a:spcPts val="400"/>
-              </a:spcAft>
-              <a:defRPr sz="1500" b="0">
-                <a:solidFill>
-                  <a:srgbClr val="555555"/>
-                </a:solidFill>
-                <a:latin typeface="Helvetica Neue"/>
-              </a:defRPr>
-            </a:pPr>
-            <a:r>
-              <a:t>Memory, runtime, and scalability</a:t>
-            </a:r>
-          </a:p>
-        </p:txBody>
-      </p:sp>
-      <p:sp>
-        <p:nvSpPr>
-          <p:cNvPr id="15" name="Rectangle 14"/>
-          <p:cNvSpPr/>
-          <p:nvPr/>
-        </p:nvSpPr>
-        <p:spPr>
-          <a:xfrm>
-            <a:off x="9144000" y="2190750"/>
-            <a:ext cx="2571750" cy="2247900"/>
-          </a:xfrm>
-          <a:prstGeom prst="rect">
-            <a:avLst/>
-          </a:prstGeom>
-          <a:solidFill>
-            <a:srgbClr val="EDEDED"/>
-          </a:solidFill>
-          <a:ln>
-            <a:noFill/>
-          </a:ln>
-        </p:spPr>
-        <p:style>
-          <a:lnRef idx="1">
-            <a:schemeClr val="accent1"/>
-          </a:lnRef>
-          <a:fillRef idx="3">
-            <a:schemeClr val="accent1"/>
-          </a:fillRef>
-          <a:effectRef idx="2">
-            <a:schemeClr val="accent1"/>
-          </a:effectRef>
-          <a:fontRef idx="minor">
-            <a:schemeClr val="lt1"/>
-          </a:fontRef>
-        </p:style>
-        <p:txBody>
-          <a:bodyPr rtlCol="0" anchor="ctr"/>
-          <a:lstStyle/>
-          <a:p>
-            <a:pPr algn="ctr"/>
-            <a:endParaRPr/>
-          </a:p>
-        </p:txBody>
-      </p:sp>
-      <p:sp>
-        <p:nvSpPr>
-          <p:cNvPr id="16" name="TextBox 15"/>
-          <p:cNvSpPr txBox="1"/>
-          <p:nvPr/>
-        </p:nvSpPr>
-        <p:spPr>
-          <a:xfrm>
-            <a:off x="9372600" y="2457450"/>
-            <a:ext cx="2095499" cy="781050"/>
-          </a:xfrm>
-          <a:prstGeom prst="rect">
-            <a:avLst/>
-          </a:prstGeom>
-          <a:noFill/>
-        </p:spPr>
-        <p:txBody>
-          <a:bodyPr wrap="square" lIns="0" tIns="0" rIns="0" bIns="0">
-            <a:normAutofit fontScale="92500"/>
-          </a:bodyPr>
-          <a:lstStyle/>
-          <a:p>
-            <a:pPr algn="l">
-              <a:spcAft>
-                <a:spcPts val="400"/>
-              </a:spcAft>
-              <a:defRPr sz="3100" b="1">
-                <a:solidFill>
-                  <a:srgbClr val="000000"/>
-                </a:solidFill>
-                <a:latin typeface="Helvetica Neue"/>
-              </a:defRPr>
-            </a:pPr>
-            <a:r>
-              <a:rPr sz="3000" dirty="0"/>
-              <a:t>Robustness</a:t>
-            </a:r>
-            <a:endParaRPr dirty="0"/>
-          </a:p>
-        </p:txBody>
-      </p:sp>
-      <p:sp>
-        <p:nvSpPr>
-          <p:cNvPr id="17" name="TextBox 16"/>
-          <p:cNvSpPr txBox="1"/>
-          <p:nvPr/>
-        </p:nvSpPr>
-        <p:spPr>
-          <a:xfrm>
-            <a:off x="9372600" y="3524250"/>
-            <a:ext cx="2095499" cy="552450"/>
-          </a:xfrm>
-          <a:prstGeom prst="rect">
-            <a:avLst/>
-          </a:prstGeom>
-          <a:noFill/>
-        </p:spPr>
-        <p:txBody>
-          <a:bodyPr wrap="square" lIns="0" tIns="0" rIns="0" bIns="0">
-            <a:normAutofit/>
-          </a:bodyPr>
-          <a:lstStyle/>
-          <a:p>
-            <a:pPr algn="l">
-              <a:spcAft>
-                <a:spcPts val="400"/>
-              </a:spcAft>
-              <a:defRPr sz="1500" b="0">
-                <a:solidFill>
-                  <a:srgbClr val="555555"/>
-                </a:solidFill>
-                <a:latin typeface="Helvetica Neue"/>
-              </a:defRPr>
-            </a:pPr>
-            <a:r>
-              <a:t>Generalization to unseen anomalies</a:t>
-            </a:r>
-          </a:p>
-        </p:txBody>
-      </p:sp>
-      <p:sp>
-        <p:nvSpPr>
-          <p:cNvPr id="18" name="TextBox 17"/>
-          <p:cNvSpPr txBox="1"/>
-          <p:nvPr/>
-        </p:nvSpPr>
-        <p:spPr>
-          <a:xfrm>
-            <a:off x="400050" y="5200650"/>
-            <a:ext cx="1428750" cy="323850"/>
-          </a:xfrm>
-          <a:prstGeom prst="rect">
-            <a:avLst/>
-          </a:prstGeom>
-          <a:noFill/>
-        </p:spPr>
-        <p:txBody>
-          <a:bodyPr wrap="square" lIns="0" tIns="0" rIns="0" bIns="0">
-            <a:normAutofit/>
-          </a:bodyPr>
-          <a:lstStyle/>
-          <a:p>
-            <a:pPr algn="l">
-              <a:spcAft>
-                <a:spcPts val="400"/>
-              </a:spcAft>
-              <a:defRPr sz="1900" b="1">
-                <a:solidFill>
-                  <a:srgbClr val="000000"/>
-                </a:solidFill>
-                <a:latin typeface="Helvetica Neue"/>
-              </a:defRPr>
-            </a:pPr>
-            <a:r>
-              <a:t>Datasets</a:t>
-            </a:r>
-          </a:p>
-        </p:txBody>
-      </p:sp>
-      <p:sp>
-        <p:nvSpPr>
-          <p:cNvPr id="19" name="TextBox 18"/>
-          <p:cNvSpPr txBox="1"/>
-          <p:nvPr/>
-        </p:nvSpPr>
-        <p:spPr>
-          <a:xfrm>
-            <a:off x="2038349" y="5200650"/>
-            <a:ext cx="6191250" cy="323850"/>
-          </a:xfrm>
-          <a:prstGeom prst="rect">
-            <a:avLst/>
-          </a:prstGeom>
-          <a:noFill/>
-        </p:spPr>
-        <p:txBody>
-          <a:bodyPr wrap="square" lIns="0" tIns="0" rIns="0" bIns="0">
-            <a:normAutofit/>
-          </a:bodyPr>
-          <a:lstStyle/>
-          <a:p>
-            <a:pPr algn="l">
-              <a:spcAft>
-                <a:spcPts val="400"/>
-              </a:spcAft>
-              <a:defRPr sz="1900" b="0">
-                <a:solidFill>
-                  <a:srgbClr val="000000"/>
-                </a:solidFill>
-                <a:latin typeface="Helvetica Neue"/>
-              </a:defRPr>
-            </a:pPr>
-            <a:r>
-              <a:t>UCF-Crime | XD-Violence | ShanghaiTech</a:t>
-            </a:r>
-          </a:p>
-        </p:txBody>
-      </p:sp>
-      <p:sp>
-        <p:nvSpPr>
-          <p:cNvPr id="21" name="TextBox 1">
+      <p:graphicFrame>
+        <p:nvGraphicFramePr>
+          <p:cNvPr id="11" name="Tabla 10">
             <a:extLst>
               <a:ext uri="{FF2B5EF4-FFF2-40B4-BE49-F238E27FC236}">
-                <a16:creationId xmlns:a16="http://schemas.microsoft.com/office/drawing/2014/main" id="{360184CC-3246-1C5E-1C0A-2253D8B90F09}"/>
+                <a16:creationId xmlns:a16="http://schemas.microsoft.com/office/drawing/2014/main" id="{2F46616F-3838-28BC-1E68-67D7C2130FFC}"/>
+              </a:ext>
+            </a:extLst>
+          </p:cNvPr>
+          <p:cNvGraphicFramePr>
+            <a:graphicFrameLocks noGrp="1"/>
+          </p:cNvGraphicFramePr>
+          <p:nvPr>
+            <p:extLst>
+              <p:ext uri="{D42A27DB-BD31-4B8C-83A1-F6EECF244321}">
+                <p14:modId xmlns:p14="http://schemas.microsoft.com/office/powerpoint/2010/main" val="2012867046"/>
+              </p:ext>
+            </p:extLst>
+          </p:nvPr>
+        </p:nvGraphicFramePr>
+        <p:xfrm>
+          <a:off x="400050" y="1487349"/>
+          <a:ext cx="11334752" cy="3205480"/>
+        </p:xfrm>
+        <a:graphic>
+          <a:graphicData uri="http://schemas.openxmlformats.org/drawingml/2006/table">
+            <a:tbl>
+              <a:tblPr firstRow="1" bandRow="1">
+                <a:tableStyleId>{5C22544A-7EE6-4342-B048-85BDC9FD1C3A}</a:tableStyleId>
+              </a:tblPr>
+              <a:tblGrid>
+                <a:gridCol w="2833688">
+                  <a:extLst>
+                    <a:ext uri="{9D8B030D-6E8A-4147-A177-3AD203B41FA5}">
+                      <a16:colId xmlns:a16="http://schemas.microsoft.com/office/drawing/2014/main" val="2026014459"/>
+                    </a:ext>
+                  </a:extLst>
+                </a:gridCol>
+                <a:gridCol w="2833688">
+                  <a:extLst>
+                    <a:ext uri="{9D8B030D-6E8A-4147-A177-3AD203B41FA5}">
+                      <a16:colId xmlns:a16="http://schemas.microsoft.com/office/drawing/2014/main" val="2252513185"/>
+                    </a:ext>
+                  </a:extLst>
+                </a:gridCol>
+                <a:gridCol w="2833688">
+                  <a:extLst>
+                    <a:ext uri="{9D8B030D-6E8A-4147-A177-3AD203B41FA5}">
+                      <a16:colId xmlns:a16="http://schemas.microsoft.com/office/drawing/2014/main" val="2363321394"/>
+                    </a:ext>
+                  </a:extLst>
+                </a:gridCol>
+                <a:gridCol w="2833688">
+                  <a:extLst>
+                    <a:ext uri="{9D8B030D-6E8A-4147-A177-3AD203B41FA5}">
+                      <a16:colId xmlns:a16="http://schemas.microsoft.com/office/drawing/2014/main" val="3924409369"/>
+                    </a:ext>
+                  </a:extLst>
+                </a:gridCol>
+              </a:tblGrid>
+              <a:tr h="370840">
+                <a:tc>
+                  <a:txBody>
+                    <a:bodyPr/>
+                    <a:lstStyle/>
+                    <a:p>
+                      <a:r>
+                        <a:rPr lang="en-US" noProof="0" dirty="0"/>
+                        <a:t>Previous approach</a:t>
+                      </a:r>
+                    </a:p>
+                  </a:txBody>
+                  <a:tcPr anchor="ctr"/>
+                </a:tc>
+                <a:tc>
+                  <a:txBody>
+                    <a:bodyPr/>
+                    <a:lstStyle/>
+                    <a:p>
+                      <a:r>
+                        <a:rPr lang="es-MX"/>
+                        <a:t>Strength</a:t>
+                      </a:r>
+                    </a:p>
+                  </a:txBody>
+                  <a:tcPr anchor="ctr"/>
+                </a:tc>
+                <a:tc>
+                  <a:txBody>
+                    <a:bodyPr/>
+                    <a:lstStyle/>
+                    <a:p>
+                      <a:r>
+                        <a:rPr lang="es-MX"/>
+                        <a:t>Remaining problem</a:t>
+                      </a:r>
+                    </a:p>
+                  </a:txBody>
+                  <a:tcPr anchor="ctr"/>
+                </a:tc>
+                <a:tc>
+                  <a:txBody>
+                    <a:bodyPr/>
+                    <a:lstStyle/>
+                    <a:p>
+                      <a:r>
+                        <a:rPr lang="es-MX"/>
+                        <a:t>Research direction</a:t>
+                      </a:r>
+                    </a:p>
+                  </a:txBody>
+                  <a:tcPr anchor="ctr"/>
+                </a:tc>
+                <a:extLst>
+                  <a:ext uri="{0D108BD9-81ED-4DB2-BD59-A6C34878D82A}">
+                    <a16:rowId xmlns:a16="http://schemas.microsoft.com/office/drawing/2014/main" val="2105976543"/>
+                  </a:ext>
+                </a:extLst>
+              </a:tr>
+              <a:tr h="370840">
+                <a:tc>
+                  <a:txBody>
+                    <a:bodyPr/>
+                    <a:lstStyle/>
+                    <a:p>
+                      <a:r>
+                        <a:rPr lang="es-MX" b="1"/>
+                        <a:t>RTFM</a:t>
+                      </a:r>
+                      <a:endParaRPr lang="es-MX"/>
+                    </a:p>
+                  </a:txBody>
+                  <a:tcPr anchor="ctr"/>
+                </a:tc>
+                <a:tc>
+                  <a:txBody>
+                    <a:bodyPr/>
+                    <a:lstStyle/>
+                    <a:p>
+                      <a:r>
+                        <a:rPr lang="es-MX"/>
+                        <a:t>Robust MIL + temporal dependencies</a:t>
+                      </a:r>
+                    </a:p>
+                  </a:txBody>
+                  <a:tcPr anchor="ctr"/>
+                </a:tc>
+                <a:tc>
+                  <a:txBody>
+                    <a:bodyPr/>
+                    <a:lstStyle/>
+                    <a:p>
+                      <a:r>
+                        <a:rPr lang="en-US"/>
+                        <a:t>Temporal modeling relies on CNN/self-attention</a:t>
+                      </a:r>
+                    </a:p>
+                  </a:txBody>
+                  <a:tcPr anchor="ctr"/>
+                </a:tc>
+                <a:tc>
+                  <a:txBody>
+                    <a:bodyPr/>
+                    <a:lstStyle/>
+                    <a:p>
+                      <a:r>
+                        <a:rPr lang="es-MX" b="1"/>
+                        <a:t>Efficient sequence modeling</a:t>
+                      </a:r>
+                      <a:endParaRPr lang="es-MX"/>
+                    </a:p>
+                  </a:txBody>
+                  <a:tcPr anchor="ctr"/>
+                </a:tc>
+                <a:extLst>
+                  <a:ext uri="{0D108BD9-81ED-4DB2-BD59-A6C34878D82A}">
+                    <a16:rowId xmlns:a16="http://schemas.microsoft.com/office/drawing/2014/main" val="1021308401"/>
+                  </a:ext>
+                </a:extLst>
+              </a:tr>
+              <a:tr h="370840">
+                <a:tc>
+                  <a:txBody>
+                    <a:bodyPr/>
+                    <a:lstStyle/>
+                    <a:p>
+                      <a:r>
+                        <a:rPr lang="es-MX" b="1"/>
+                        <a:t>VadCLIP</a:t>
+                      </a:r>
+                      <a:endParaRPr lang="es-MX"/>
+                    </a:p>
+                  </a:txBody>
+                  <a:tcPr anchor="ctr"/>
+                </a:tc>
+                <a:tc>
+                  <a:txBody>
+                    <a:bodyPr/>
+                    <a:lstStyle/>
+                    <a:p>
+                      <a:r>
+                        <a:rPr lang="es-MX"/>
+                        <a:t>Rich visual-language semantics</a:t>
+                      </a:r>
+                    </a:p>
+                  </a:txBody>
+                  <a:tcPr anchor="ctr"/>
+                </a:tc>
+                <a:tc>
+                  <a:txBody>
+                    <a:bodyPr/>
+                    <a:lstStyle/>
+                    <a:p>
+                      <a:r>
+                        <a:rPr lang="en-US"/>
+                        <a:t>Limited temporal reasoning of dynamic anomalies</a:t>
+                      </a:r>
+                    </a:p>
+                  </a:txBody>
+                  <a:tcPr anchor="ctr"/>
+                </a:tc>
+                <a:tc>
+                  <a:txBody>
+                    <a:bodyPr/>
+                    <a:lstStyle/>
+                    <a:p>
+                      <a:r>
+                        <a:rPr lang="en-US" b="1" noProof="0" dirty="0"/>
+                        <a:t>Temporal-semantic integration</a:t>
+                      </a:r>
+                      <a:endParaRPr lang="en-US" noProof="0" dirty="0"/>
+                    </a:p>
+                  </a:txBody>
+                  <a:tcPr anchor="ctr"/>
+                </a:tc>
+                <a:extLst>
+                  <a:ext uri="{0D108BD9-81ED-4DB2-BD59-A6C34878D82A}">
+                    <a16:rowId xmlns:a16="http://schemas.microsoft.com/office/drawing/2014/main" val="4172334546"/>
+                  </a:ext>
+                </a:extLst>
+              </a:tr>
+              <a:tr h="370840">
+                <a:tc>
+                  <a:txBody>
+                    <a:bodyPr/>
+                    <a:lstStyle/>
+                    <a:p>
+                      <a:r>
+                        <a:rPr lang="es-MX" b="1" dirty="0"/>
+                        <a:t>OV-VAD</a:t>
+                      </a:r>
+                      <a:endParaRPr lang="es-MX" dirty="0"/>
+                    </a:p>
+                  </a:txBody>
+                  <a:tcPr anchor="ctr"/>
+                </a:tc>
+                <a:tc>
+                  <a:txBody>
+                    <a:bodyPr/>
+                    <a:lstStyle/>
+                    <a:p>
+                      <a:r>
+                        <a:rPr lang="es-MX"/>
+                        <a:t>Detects unseen anomaly categories</a:t>
+                      </a:r>
+                    </a:p>
+                  </a:txBody>
+                  <a:tcPr anchor="ctr"/>
+                </a:tc>
+                <a:tc>
+                  <a:txBody>
+                    <a:bodyPr/>
+                    <a:lstStyle/>
+                    <a:p>
+                      <a:r>
+                        <a:rPr lang="en-US"/>
+                        <a:t>Open-vocabulary semantics ≠ robust temporal representation</a:t>
+                      </a:r>
+                    </a:p>
+                  </a:txBody>
+                  <a:tcPr anchor="ctr"/>
+                </a:tc>
+                <a:tc>
+                  <a:txBody>
+                    <a:bodyPr/>
+                    <a:lstStyle/>
+                    <a:p>
+                      <a:r>
+                        <a:rPr lang="es-MX" b="1"/>
+                        <a:t>Generalizable temporal representation</a:t>
+                      </a:r>
+                      <a:endParaRPr lang="es-MX"/>
+                    </a:p>
+                  </a:txBody>
+                  <a:tcPr anchor="ctr"/>
+                </a:tc>
+                <a:extLst>
+                  <a:ext uri="{0D108BD9-81ED-4DB2-BD59-A6C34878D82A}">
+                    <a16:rowId xmlns:a16="http://schemas.microsoft.com/office/drawing/2014/main" val="3020232864"/>
+                  </a:ext>
+                </a:extLst>
+              </a:tr>
+              <a:tr h="370840">
+                <a:tc>
+                  <a:txBody>
+                    <a:bodyPr/>
+                    <a:lstStyle/>
+                    <a:p>
+                      <a:r>
+                        <a:rPr lang="en-US" b="1" noProof="0" dirty="0"/>
+                        <a:t>Mamba-based VAD</a:t>
+                      </a:r>
+                      <a:endParaRPr lang="en-US" noProof="0" dirty="0"/>
+                    </a:p>
+                  </a:txBody>
+                  <a:tcPr anchor="ctr"/>
+                </a:tc>
+                <a:tc>
+                  <a:txBody>
+                    <a:bodyPr/>
+                    <a:lstStyle/>
+                    <a:p>
+                      <a:r>
+                        <a:rPr lang="es-MX"/>
+                        <a:t>Efficient long-sequence modeling</a:t>
+                      </a:r>
+                    </a:p>
+                  </a:txBody>
+                  <a:tcPr anchor="ctr"/>
+                </a:tc>
+                <a:tc>
+                  <a:txBody>
+                    <a:bodyPr/>
+                    <a:lstStyle/>
+                    <a:p>
+                      <a:r>
+                        <a:rPr lang="en-US"/>
+                        <a:t>Original causal formulation is not directly suited to VAD</a:t>
+                      </a:r>
+                    </a:p>
+                  </a:txBody>
+                  <a:tcPr anchor="ctr"/>
+                </a:tc>
+                <a:tc>
+                  <a:txBody>
+                    <a:bodyPr/>
+                    <a:lstStyle/>
+                    <a:p>
+                      <a:r>
+                        <a:rPr lang="en-US" b="1" dirty="0"/>
+                        <a:t>VAD-specific non-causal SSM design</a:t>
+                      </a:r>
+                      <a:endParaRPr lang="en-US" dirty="0"/>
+                    </a:p>
+                  </a:txBody>
+                  <a:tcPr anchor="ctr"/>
+                </a:tc>
+                <a:extLst>
+                  <a:ext uri="{0D108BD9-81ED-4DB2-BD59-A6C34878D82A}">
+                    <a16:rowId xmlns:a16="http://schemas.microsoft.com/office/drawing/2014/main" val="2944001187"/>
+                  </a:ext>
+                </a:extLst>
+              </a:tr>
+            </a:tbl>
+          </a:graphicData>
+        </a:graphic>
+      </p:graphicFrame>
+      <p:sp>
+        <p:nvSpPr>
+          <p:cNvPr id="13" name="CuadroTexto 12">
+            <a:extLst>
+              <a:ext uri="{FF2B5EF4-FFF2-40B4-BE49-F238E27FC236}">
+                <a16:creationId xmlns:a16="http://schemas.microsoft.com/office/drawing/2014/main" id="{4546943C-8B7C-05EE-13D1-23EF7A370EDD}"/>
               </a:ext>
             </a:extLst>
           </p:cNvPr>
@@ -12190,8 +12836,8 @@
         </p:nvSpPr>
         <p:spPr>
           <a:xfrm>
-            <a:off x="6309360" y="353059"/>
-            <a:ext cx="5482590" cy="209550"/>
+            <a:off x="400050" y="5102855"/>
+            <a:ext cx="11334750" cy="1754326"/>
           </a:xfrm>
           <a:prstGeom prst="rect">
             <a:avLst/>
@@ -12199,64 +12845,92 @@
           <a:noFill/>
         </p:spPr>
         <p:txBody>
-          <a:bodyPr wrap="square" lIns="0" tIns="0" rIns="0" bIns="0">
-            <a:normAutofit/>
+          <a:bodyPr wrap="square" rtlCol="0">
+            <a:spAutoFit/>
           </a:bodyPr>
           <a:lstStyle/>
           <a:p>
-            <a:pPr algn="l">
-              <a:spcAft>
-                <a:spcPts val="400"/>
-              </a:spcAft>
-              <a:defRPr sz="2300" b="0">
-                <a:solidFill>
-                  <a:srgbClr val="000000"/>
-                </a:solidFill>
-                <a:latin typeface="Helvetica Neue"/>
-              </a:defRPr>
+            <a:r>
+              <a:rPr lang="en-US" b="1" dirty="0"/>
+              <a:t>Robust Temporal Representation Learning:</a:t>
+            </a:r>
+          </a:p>
+          <a:p>
+            <a:endParaRPr lang="en-US" b="1" dirty="0"/>
+          </a:p>
+          <a:p>
+            <a:pPr marL="342900" indent="-342900">
+              <a:buAutoNum type="arabicPeriod"/>
             </a:pPr>
             <a:r>
-              <a:rPr lang="en-US" sz="1300" b="1" i="1" dirty="0">
-                <a:solidFill>
-                  <a:srgbClr val="555555"/>
-                </a:solidFill>
-                <a:latin typeface="Helvetica Neue"/>
-              </a:rPr>
-              <a:t>04 Three-stage methodology, evaluation, and expected contributions</a:t>
-            </a:r>
-          </a:p>
-        </p:txBody>
-      </p:sp>
-      <p:sp>
-        <p:nvSpPr>
-          <p:cNvPr id="22" name="Marcador de número de diapositiva 21">
+              <a:rPr lang="en-US" dirty="0"/>
+              <a:t>Efficient temporal modeling→ SSM/Mamba-based sequence modeling</a:t>
+            </a:r>
+          </a:p>
+          <a:p>
+            <a:pPr marL="342900" indent="-342900">
+              <a:buAutoNum type="arabicPeriod"/>
+            </a:pPr>
+            <a:r>
+              <a:rPr lang="en-US" dirty="0"/>
+              <a:t>Semantic enrichment→ VLM-based contextual/semantic information</a:t>
+            </a:r>
+          </a:p>
+          <a:p>
+            <a:pPr marL="342900" indent="-342900">
+              <a:buAutoNum type="arabicPeriod"/>
+            </a:pPr>
+            <a:r>
+              <a:rPr lang="en-US" dirty="0"/>
+              <a:t>Robust generalization→ representation designed to handle weak, ambiguous, and unseen anomalies</a:t>
+            </a:r>
+          </a:p>
+          <a:p>
+            <a:endParaRPr lang="es-MX" b="1" dirty="0"/>
+          </a:p>
+        </p:txBody>
+      </p:sp>
+      <p:sp>
+        <p:nvSpPr>
+          <p:cNvPr id="15" name="CuadroTexto 14">
             <a:extLst>
               <a:ext uri="{FF2B5EF4-FFF2-40B4-BE49-F238E27FC236}">
-                <a16:creationId xmlns:a16="http://schemas.microsoft.com/office/drawing/2014/main" id="{9E3F7E97-0B9B-EE9F-071E-4B301C365303}"/>
+                <a16:creationId xmlns:a16="http://schemas.microsoft.com/office/drawing/2014/main" id="{C01BCDC8-A899-C518-4ED9-6FB3A351152B}"/>
               </a:ext>
             </a:extLst>
           </p:cNvPr>
-          <p:cNvSpPr>
-            <a:spLocks noGrp="1"/>
-          </p:cNvSpPr>
-          <p:nvPr>
-            <p:ph type="sldNum" sz="quarter" idx="12"/>
-          </p:nvPr>
-        </p:nvSpPr>
-        <p:spPr/>
-        <p:txBody>
-          <a:bodyPr/>
-          <a:lstStyle/>
-          <a:p>
-            <a:fld id="{C1FF6DA9-008F-8B48-92A6-B652298478BF}" type="slidenum">
-              <a:rPr lang="en-US" smtClean="0"/>
-              <a:t>9</a:t>
-            </a:fld>
-            <a:endParaRPr lang="en-US"/>
+          <p:cNvSpPr txBox="1"/>
+          <p:nvPr/>
+        </p:nvSpPr>
+        <p:spPr>
+          <a:xfrm>
+            <a:off x="10328787" y="5630279"/>
+            <a:ext cx="1406013" cy="523220"/>
+          </a:xfrm>
+          <a:prstGeom prst="rect">
+            <a:avLst/>
+          </a:prstGeom>
+          <a:noFill/>
+        </p:spPr>
+        <p:txBody>
+          <a:bodyPr wrap="square">
+            <a:spAutoFit/>
+          </a:bodyPr>
+          <a:lstStyle/>
+          <a:p>
+            <a:r>
+              <a:rPr lang="es-MX" sz="2800" b="1" dirty="0"/>
+              <a:t>WSVAD</a:t>
+            </a:r>
           </a:p>
         </p:txBody>
       </p:sp>
     </p:spTree>
+    <p:extLst>
+      <p:ext uri="{BB962C8B-B14F-4D97-AF65-F5344CB8AC3E}">
+        <p14:creationId xmlns:p14="http://schemas.microsoft.com/office/powerpoint/2010/main" val="1924308734"/>
+      </p:ext>
+    </p:extLst>
   </p:cSld>
   <p:clrMapOvr>
     <a:masterClrMapping/>

--- a/presentations/research_plan_wsvad_phd_english.pptx
+++ b/presentations/research_plan_wsvad_phd_english.pptx
@@ -219,7 +219,7 @@
           <a:p>
             <a:fld id="{F6753520-9148-4373-BAA4-B078924F91BA}" type="datetimeFigureOut">
               <a:rPr lang="es-MX" smtClean="0"/>
-              <a:t>18/08/2026</a:t>
+              <a:t>19/08/2026</a:t>
             </a:fld>
             <a:endParaRPr lang="es-MX"/>
           </a:p>
@@ -749,7 +749,7 @@
           <a:p>
             <a:fld id="{78DB436E-925D-4F89-B73C-C97BBB73A2F1}" type="datetime1">
               <a:rPr lang="en-US" smtClean="0"/>
-              <a:t>8/18/2026</a:t>
+              <a:t>8/19/2026</a:t>
             </a:fld>
             <a:endParaRPr lang="en-US"/>
           </a:p>
@@ -917,7 +917,7 @@
           <a:p>
             <a:fld id="{133EB1BB-3A36-4D6D-A0FD-7206E2A10C1E}" type="datetime1">
               <a:rPr lang="en-US" smtClean="0"/>
-              <a:t>8/18/2026</a:t>
+              <a:t>8/19/2026</a:t>
             </a:fld>
             <a:endParaRPr lang="en-US"/>
           </a:p>
@@ -1095,7 +1095,7 @@
           <a:p>
             <a:fld id="{EDFA8361-70E0-46C6-8194-13E8F23ED013}" type="datetime1">
               <a:rPr lang="en-US" smtClean="0"/>
-              <a:t>8/18/2026</a:t>
+              <a:t>8/19/2026</a:t>
             </a:fld>
             <a:endParaRPr lang="en-US"/>
           </a:p>
@@ -1263,7 +1263,7 @@
           <a:p>
             <a:fld id="{E5206AFD-ECC1-4DF3-BF86-122EFFD5514E}" type="datetime1">
               <a:rPr lang="en-US" smtClean="0"/>
-              <a:t>8/18/2026</a:t>
+              <a:t>8/19/2026</a:t>
             </a:fld>
             <a:endParaRPr lang="en-US"/>
           </a:p>
@@ -1508,7 +1508,7 @@
           <a:p>
             <a:fld id="{EE7F0C0A-E3BB-4895-9CFB-BED0E9FC9D04}" type="datetime1">
               <a:rPr lang="en-US" smtClean="0"/>
-              <a:t>8/18/2026</a:t>
+              <a:t>8/19/2026</a:t>
             </a:fld>
             <a:endParaRPr lang="en-US"/>
           </a:p>
@@ -1793,7 +1793,7 @@
           <a:p>
             <a:fld id="{9A61435A-07AE-438E-AF20-E4E6BBC17193}" type="datetime1">
               <a:rPr lang="en-US" smtClean="0"/>
-              <a:t>8/18/2026</a:t>
+              <a:t>8/19/2026</a:t>
             </a:fld>
             <a:endParaRPr lang="en-US"/>
           </a:p>
@@ -2212,7 +2212,7 @@
           <a:p>
             <a:fld id="{932B9363-547B-4541-B5EA-F83F9CCB3EE3}" type="datetime1">
               <a:rPr lang="en-US" smtClean="0"/>
-              <a:t>8/18/2026</a:t>
+              <a:t>8/19/2026</a:t>
             </a:fld>
             <a:endParaRPr lang="en-US"/>
           </a:p>
@@ -2329,7 +2329,7 @@
           <a:p>
             <a:fld id="{D7C36C21-FE8D-4478-8A69-59AD09E664D5}" type="datetime1">
               <a:rPr lang="en-US" smtClean="0"/>
-              <a:t>8/18/2026</a:t>
+              <a:t>8/19/2026</a:t>
             </a:fld>
             <a:endParaRPr lang="en-US"/>
           </a:p>
@@ -2424,7 +2424,7 @@
           <a:p>
             <a:fld id="{DA05C467-F8EA-4F3E-B0E3-01A2354294BA}" type="datetime1">
               <a:rPr lang="en-US" smtClean="0"/>
-              <a:t>8/18/2026</a:t>
+              <a:t>8/19/2026</a:t>
             </a:fld>
             <a:endParaRPr lang="en-US"/>
           </a:p>
@@ -2699,7 +2699,7 @@
           <a:p>
             <a:fld id="{0EB99298-B17F-440A-894A-5EC2820DB843}" type="datetime1">
               <a:rPr lang="en-US" smtClean="0"/>
-              <a:t>8/18/2026</a:t>
+              <a:t>8/19/2026</a:t>
             </a:fld>
             <a:endParaRPr lang="en-US"/>
           </a:p>
@@ -2951,7 +2951,7 @@
           <a:p>
             <a:fld id="{2A746ACC-82C2-45E3-ABB3-54CA1D88603E}" type="datetime1">
               <a:rPr lang="en-US" smtClean="0"/>
-              <a:t>8/18/2026</a:t>
+              <a:t>8/19/2026</a:t>
             </a:fld>
             <a:endParaRPr lang="en-US"/>
           </a:p>
@@ -3162,7 +3162,7 @@
           <a:p>
             <a:fld id="{8A644CAE-3B49-40FB-A78F-EB1FCDBA88A7}" type="datetime1">
               <a:rPr lang="en-US" smtClean="0"/>
-              <a:t>8/18/2026</a:t>
+              <a:t>8/19/2026</a:t>
             </a:fld>
             <a:endParaRPr lang="en-US"/>
           </a:p>
@@ -4585,57 +4585,6 @@
       </p:sp>
       <p:sp>
         <p:nvSpPr>
-          <p:cNvPr id="21" name="TextBox 1">
-            <a:extLst>
-              <a:ext uri="{FF2B5EF4-FFF2-40B4-BE49-F238E27FC236}">
-                <a16:creationId xmlns:a16="http://schemas.microsoft.com/office/drawing/2014/main" id="{360184CC-3246-1C5E-1C0A-2253D8B90F09}"/>
-              </a:ext>
-            </a:extLst>
-          </p:cNvPr>
-          <p:cNvSpPr txBox="1"/>
-          <p:nvPr/>
-        </p:nvSpPr>
-        <p:spPr>
-          <a:xfrm>
-            <a:off x="6309360" y="353059"/>
-            <a:ext cx="5482590" cy="209550"/>
-          </a:xfrm>
-          <a:prstGeom prst="rect">
-            <a:avLst/>
-          </a:prstGeom>
-          <a:noFill/>
-        </p:spPr>
-        <p:txBody>
-          <a:bodyPr wrap="square" lIns="0" tIns="0" rIns="0" bIns="0">
-            <a:normAutofit/>
-          </a:bodyPr>
-          <a:lstStyle/>
-          <a:p>
-            <a:pPr algn="l">
-              <a:spcAft>
-                <a:spcPts val="400"/>
-              </a:spcAft>
-              <a:defRPr sz="2300" b="0">
-                <a:solidFill>
-                  <a:srgbClr val="000000"/>
-                </a:solidFill>
-                <a:latin typeface="Helvetica Neue"/>
-              </a:defRPr>
-            </a:pPr>
-            <a:r>
-              <a:rPr lang="en-US" sz="1300" b="1" i="1" dirty="0">
-                <a:solidFill>
-                  <a:srgbClr val="555555"/>
-                </a:solidFill>
-                <a:latin typeface="Helvetica Neue"/>
-              </a:rPr>
-              <a:t>04 Three-stage methodology, evaluation, and expected contributions</a:t>
-            </a:r>
-          </a:p>
-        </p:txBody>
-      </p:sp>
-      <p:sp>
-        <p:nvSpPr>
           <p:cNvPr id="22" name="Marcador de número de diapositiva 21">
             <a:extLst>
               <a:ext uri="{FF2B5EF4-FFF2-40B4-BE49-F238E27FC236}">
@@ -4660,6 +4609,57 @@
               <a:t>10</a:t>
             </a:fld>
             <a:endParaRPr lang="en-US"/>
+          </a:p>
+        </p:txBody>
+      </p:sp>
+      <p:sp>
+        <p:nvSpPr>
+          <p:cNvPr id="23" name="TextBox 1">
+            <a:extLst>
+              <a:ext uri="{FF2B5EF4-FFF2-40B4-BE49-F238E27FC236}">
+                <a16:creationId xmlns:a16="http://schemas.microsoft.com/office/drawing/2014/main" id="{3505C78D-1CFD-A4F6-3A1C-4CBD23C6E51C}"/>
+              </a:ext>
+            </a:extLst>
+          </p:cNvPr>
+          <p:cNvSpPr txBox="1"/>
+          <p:nvPr/>
+        </p:nvSpPr>
+        <p:spPr>
+          <a:xfrm>
+            <a:off x="4975123" y="353059"/>
+            <a:ext cx="6816827" cy="209550"/>
+          </a:xfrm>
+          <a:prstGeom prst="rect">
+            <a:avLst/>
+          </a:prstGeom>
+          <a:noFill/>
+        </p:spPr>
+        <p:txBody>
+          <a:bodyPr wrap="square" lIns="0" tIns="0" rIns="0" bIns="0">
+            <a:normAutofit fontScale="92500"/>
+          </a:bodyPr>
+          <a:lstStyle/>
+          <a:p>
+            <a:pPr algn="l">
+              <a:spcAft>
+                <a:spcPts val="400"/>
+              </a:spcAft>
+              <a:defRPr sz="2300" b="0">
+                <a:solidFill>
+                  <a:srgbClr val="000000"/>
+                </a:solidFill>
+                <a:latin typeface="Helvetica Neue"/>
+              </a:defRPr>
+            </a:pPr>
+            <a:r>
+              <a:rPr lang="en-US" sz="1300" b="1" i="1" dirty="0">
+                <a:solidFill>
+                  <a:srgbClr val="555555"/>
+                </a:solidFill>
+                <a:latin typeface="Helvetica Neue"/>
+              </a:rPr>
+              <a:t>04 Three-stage methodology,  previous research, evaluation, and expected contributions</a:t>
+            </a:r>
           </a:p>
         </p:txBody>
       </p:sp>
@@ -5174,57 +5174,6 @@
       </p:sp>
       <p:sp>
         <p:nvSpPr>
-          <p:cNvPr id="20" name="TextBox 1">
-            <a:extLst>
-              <a:ext uri="{FF2B5EF4-FFF2-40B4-BE49-F238E27FC236}">
-                <a16:creationId xmlns:a16="http://schemas.microsoft.com/office/drawing/2014/main" id="{5B530FE7-0A21-A1C0-F81C-2EE88FA63775}"/>
-              </a:ext>
-            </a:extLst>
-          </p:cNvPr>
-          <p:cNvSpPr txBox="1"/>
-          <p:nvPr/>
-        </p:nvSpPr>
-        <p:spPr>
-          <a:xfrm>
-            <a:off x="6309360" y="353059"/>
-            <a:ext cx="5482590" cy="209550"/>
-          </a:xfrm>
-          <a:prstGeom prst="rect">
-            <a:avLst/>
-          </a:prstGeom>
-          <a:noFill/>
-        </p:spPr>
-        <p:txBody>
-          <a:bodyPr wrap="square" lIns="0" tIns="0" rIns="0" bIns="0">
-            <a:normAutofit/>
-          </a:bodyPr>
-          <a:lstStyle/>
-          <a:p>
-            <a:pPr algn="l">
-              <a:spcAft>
-                <a:spcPts val="400"/>
-              </a:spcAft>
-              <a:defRPr sz="2300" b="0">
-                <a:solidFill>
-                  <a:srgbClr val="000000"/>
-                </a:solidFill>
-                <a:latin typeface="Helvetica Neue"/>
-              </a:defRPr>
-            </a:pPr>
-            <a:r>
-              <a:rPr lang="en-US" sz="1300" b="1" i="1" dirty="0">
-                <a:solidFill>
-                  <a:srgbClr val="555555"/>
-                </a:solidFill>
-                <a:latin typeface="Helvetica Neue"/>
-              </a:rPr>
-              <a:t>04 Three-stage methodology, evaluation, and expected contributions</a:t>
-            </a:r>
-          </a:p>
-        </p:txBody>
-      </p:sp>
-      <p:sp>
-        <p:nvSpPr>
           <p:cNvPr id="21" name="Marcador de número de diapositiva 20">
             <a:extLst>
               <a:ext uri="{FF2B5EF4-FFF2-40B4-BE49-F238E27FC236}">
@@ -5249,6 +5198,57 @@
               <a:t>11</a:t>
             </a:fld>
             <a:endParaRPr lang="en-US"/>
+          </a:p>
+        </p:txBody>
+      </p:sp>
+      <p:sp>
+        <p:nvSpPr>
+          <p:cNvPr id="5" name="TextBox 1">
+            <a:extLst>
+              <a:ext uri="{FF2B5EF4-FFF2-40B4-BE49-F238E27FC236}">
+                <a16:creationId xmlns:a16="http://schemas.microsoft.com/office/drawing/2014/main" id="{D4695DA2-A79E-8F7C-2092-3011170A3BFD}"/>
+              </a:ext>
+            </a:extLst>
+          </p:cNvPr>
+          <p:cNvSpPr txBox="1"/>
+          <p:nvPr/>
+        </p:nvSpPr>
+        <p:spPr>
+          <a:xfrm>
+            <a:off x="4975123" y="353059"/>
+            <a:ext cx="6816827" cy="209550"/>
+          </a:xfrm>
+          <a:prstGeom prst="rect">
+            <a:avLst/>
+          </a:prstGeom>
+          <a:noFill/>
+        </p:spPr>
+        <p:txBody>
+          <a:bodyPr wrap="square" lIns="0" tIns="0" rIns="0" bIns="0">
+            <a:normAutofit fontScale="92500"/>
+          </a:bodyPr>
+          <a:lstStyle/>
+          <a:p>
+            <a:pPr algn="l">
+              <a:spcAft>
+                <a:spcPts val="400"/>
+              </a:spcAft>
+              <a:defRPr sz="2300" b="0">
+                <a:solidFill>
+                  <a:srgbClr val="000000"/>
+                </a:solidFill>
+                <a:latin typeface="Helvetica Neue"/>
+              </a:defRPr>
+            </a:pPr>
+            <a:r>
+              <a:rPr lang="en-US" sz="1300" b="1" i="1" dirty="0">
+                <a:solidFill>
+                  <a:srgbClr val="555555"/>
+                </a:solidFill>
+                <a:latin typeface="Helvetica Neue"/>
+              </a:rPr>
+              <a:t>04 Three-stage methodology,  previous research, evaluation, and expected contributions</a:t>
+            </a:r>
           </a:p>
         </p:txBody>
       </p:sp>
@@ -5899,7 +5899,7 @@
           </p:spPr>
           <p:txBody>
             <a:bodyPr wrap="square" lIns="0" tIns="0" rIns="0" bIns="0">
-              <a:normAutofit fontScale="77500" lnSpcReduction="20000"/>
+              <a:normAutofit fontScale="70000" lnSpcReduction="20000"/>
             </a:bodyPr>
             <a:lstStyle/>
             <a:p>
@@ -5916,7 +5916,23 @@
               </a:pPr>
               <a:r>
                 <a:rPr dirty="0"/>
-                <a:t>Three-stage methodology, evaluation, and expected contributions</a:t>
+                <a:t>Three-stage methodology,</a:t>
+              </a:r>
+              <a:r>
+                <a:rPr lang="es-MX" dirty="0"/>
+                <a:t> </a:t>
+              </a:r>
+              <a:r>
+                <a:rPr lang="en-US" dirty="0"/>
+                <a:t>previous research</a:t>
+              </a:r>
+              <a:r>
+                <a:rPr lang="es-MX" dirty="0"/>
+                <a:t>, </a:t>
+              </a:r>
+              <a:r>
+                <a:rPr dirty="0"/>
+                <a:t> evaluation, and expected contributions</a:t>
               </a:r>
             </a:p>
           </p:txBody>
